--- a/10-Knowledge-Products/KP1-GEA/videos/module_5/en/decks/KP1_M5_5.4_Deck_v0.1.pptx
+++ b/10-Knowledge-Products/KP1-GEA/videos/module_5/en/decks/KP1_M5_5.4_Deck_v0.1.pptx
@@ -12606,73 +12606,18 @@
       </p:sp>
       <p:sp>
         <p:nvSpPr>
-          <p:cNvPr id="4" name="TextBox 3"/>
-          <p:cNvSpPr txBox="1"/>
-          <p:nvPr/>
-        </p:nvSpPr>
-        <p:spPr>
-          <a:xfrm>
-            <a:off x="658368" y="1600200"/>
-            <a:ext cx="10881360" cy="2651760"/>
-          </a:xfrm>
-          <a:prstGeom prst="rect">
-            <a:avLst/>
-          </a:prstGeom>
-          <a:noFill/>
-        </p:spPr>
-        <p:txBody>
-          <a:bodyPr wrap="square">
-            <a:spAutoFit/>
-          </a:bodyPr>
-          <a:lstStyle/>
-          <a:p>
-            <a:pPr>
-              <a:spcAft>
-                <a:spcPts val="1200"/>
-              </a:spcAft>
-            </a:pPr>
-            <a:r>
-              <a:rPr sz="2000" b="0" i="0">
-                <a:solidFill>
-                  <a:srgbClr val="1A1A1A"/>
-                </a:solidFill>
-                <a:latin typeface="Arial"/>
-              </a:rPr>
-              <a:t>You paste the goal in the minister's own words — every learner should have one record that follows them through school. The AI returns the capabilities, the services and the data domains it implies.</a:t>
-            </a:r>
-          </a:p>
-          <a:p>
-            <a:pPr>
-              <a:spcAft>
-                <a:spcPts val="1200"/>
-              </a:spcAft>
-            </a:pPr>
-            <a:r>
-              <a:rPr sz="2000" b="0" i="0">
-                <a:solidFill>
-                  <a:srgbClr val="1A1A1A"/>
-                </a:solidFill>
-                <a:latin typeface="Arial"/>
-              </a:rPr>
-              <a:t>And the decisions it forces: who owns the authoritative learner, which bodies must consume it, what must be built and what must be reused.</a:t>
-            </a:r>
-          </a:p>
-        </p:txBody>
-      </p:sp>
-      <p:sp>
-        <p:nvSpPr>
-          <p:cNvPr id="5" name="Rounded Rectangle 4"/>
+          <p:cNvPr id="4" name="Rounded Rectangle 3"/>
           <p:cNvSpPr/>
           <p:nvPr/>
         </p:nvSpPr>
         <p:spPr>
           <a:xfrm>
-            <a:off x="658368" y="4434840"/>
-            <a:ext cx="10881360" cy="1325880"/>
+            <a:off x="658368" y="1645920"/>
+            <a:ext cx="3246120" cy="3840480"/>
           </a:xfrm>
           <a:prstGeom prst="roundRect">
             <a:avLst>
-              <a:gd name="adj" fmla="val 4500"/>
+              <a:gd name="adj" fmla="val 8000"/>
             </a:avLst>
           </a:prstGeom>
           <a:solidFill>
@@ -12698,23 +12643,354 @@
           </a:fontRef>
         </p:style>
         <p:txBody>
-          <a:bodyPr rtlCol="0" anchor="ctr"/>
+          <a:bodyPr rtlCol="0" anchor="t" lIns="128016" rIns="128016" tIns="91440" bIns="54864" wrap="square"/>
           <a:lstStyle/>
           <a:p>
-            <a:pPr algn="ctr"/>
+            <a:pPr algn="l">
+              <a:spcAft>
+                <a:spcPts val="300"/>
+              </a:spcAft>
+            </a:pPr>
+            <a:r>
+              <a:rPr sz="1200" b="1" i="0">
+                <a:solidFill>
+                  <a:srgbClr val="006E96"/>
+                </a:solidFill>
+                <a:latin typeface="Arial"/>
+              </a:rPr>
+              <a:t>YOU PASTE</a:t>
+            </a:r>
+          </a:p>
+          <a:p>
+            <a:pPr algn="l">
+              <a:spcAft>
+                <a:spcPts val="300"/>
+              </a:spcAft>
+            </a:pPr>
+            <a:r>
+              <a:rPr sz="1450" b="0" i="0">
+                <a:solidFill>
+                  <a:srgbClr val="1A1A1A"/>
+                </a:solidFill>
+                <a:latin typeface="Arial"/>
+              </a:rPr>
+              <a:t>The minister's goal, in their own words.</a:t>
+            </a:r>
+          </a:p>
+          <a:p>
+            <a:pPr algn="l">
+              <a:spcAft>
+                <a:spcPts val="300"/>
+              </a:spcAft>
+            </a:pPr>
+            <a:r>
+              <a:rPr sz="1450" b="0" i="0">
+                <a:solidFill>
+                  <a:srgbClr val="1A1A1A"/>
+                </a:solidFill>
+                <a:latin typeface="Arial"/>
+              </a:rPr>
+              <a:t>"Every learner should have one record that follows them through school."</a:t>
+            </a:r>
           </a:p>
         </p:txBody>
       </p:sp>
       <p:sp>
         <p:nvSpPr>
-          <p:cNvPr id="6" name="TextBox 5"/>
+          <p:cNvPr id="5" name="Rounded Rectangle 4"/>
+          <p:cNvSpPr/>
+          <p:nvPr/>
+        </p:nvSpPr>
+        <p:spPr>
+          <a:xfrm>
+            <a:off x="4471416" y="1645920"/>
+            <a:ext cx="3246120" cy="3840480"/>
+          </a:xfrm>
+          <a:prstGeom prst="roundRect">
+            <a:avLst>
+              <a:gd name="adj" fmla="val 8000"/>
+            </a:avLst>
+          </a:prstGeom>
+          <a:solidFill>
+            <a:srgbClr val="F2F2F2"/>
+          </a:solidFill>
+          <a:ln>
+            <a:noFill/>
+          </a:ln>
+          <a:effectLst/>
+        </p:spPr>
+        <p:style>
+          <a:lnRef idx="1">
+            <a:schemeClr val="accent1"/>
+          </a:lnRef>
+          <a:fillRef idx="3">
+            <a:schemeClr val="accent1"/>
+          </a:fillRef>
+          <a:effectRef idx="2">
+            <a:schemeClr val="accent1"/>
+          </a:effectRef>
+          <a:fontRef idx="minor">
+            <a:schemeClr val="lt1"/>
+          </a:fontRef>
+        </p:style>
+        <p:txBody>
+          <a:bodyPr rtlCol="0" anchor="t" lIns="128016" rIns="128016" tIns="91440" bIns="54864" wrap="square"/>
+          <a:lstStyle/>
+          <a:p>
+            <a:pPr algn="l">
+              <a:spcAft>
+                <a:spcPts val="300"/>
+              </a:spcAft>
+            </a:pPr>
+            <a:r>
+              <a:rPr sz="1200" b="1" i="0">
+                <a:solidFill>
+                  <a:srgbClr val="006E96"/>
+                </a:solidFill>
+                <a:latin typeface="Arial"/>
+              </a:rPr>
+              <a:t>THE AI RETURNS</a:t>
+            </a:r>
+          </a:p>
+          <a:p>
+            <a:pPr algn="l">
+              <a:spcAft>
+                <a:spcPts val="300"/>
+              </a:spcAft>
+            </a:pPr>
+            <a:r>
+              <a:rPr sz="1450" b="0" i="0">
+                <a:solidFill>
+                  <a:srgbClr val="1A1A1A"/>
+                </a:solidFill>
+                <a:latin typeface="Arial"/>
+              </a:rPr>
+              <a:t>The capabilities it implies.</a:t>
+            </a:r>
+          </a:p>
+          <a:p>
+            <a:pPr algn="l">
+              <a:spcAft>
+                <a:spcPts val="300"/>
+              </a:spcAft>
+            </a:pPr>
+            <a:r>
+              <a:rPr sz="1450" b="0" i="0">
+                <a:solidFill>
+                  <a:srgbClr val="1A1A1A"/>
+                </a:solidFill>
+                <a:latin typeface="Arial"/>
+              </a:rPr>
+              <a:t>The services and the data domains.</a:t>
+            </a:r>
+          </a:p>
+          <a:p>
+            <a:pPr algn="l">
+              <a:spcAft>
+                <a:spcPts val="300"/>
+              </a:spcAft>
+            </a:pPr>
+            <a:r>
+              <a:rPr sz="1450" b="0" i="0">
+                <a:solidFill>
+                  <a:srgbClr val="1A1A1A"/>
+                </a:solidFill>
+                <a:latin typeface="Arial"/>
+              </a:rPr>
+              <a:t>Who owns the authoritative learner.</a:t>
+            </a:r>
+          </a:p>
+          <a:p>
+            <a:pPr algn="l">
+              <a:spcAft>
+                <a:spcPts val="300"/>
+              </a:spcAft>
+            </a:pPr>
+            <a:r>
+              <a:rPr sz="1450" b="0" i="0">
+                <a:solidFill>
+                  <a:srgbClr val="1A1A1A"/>
+                </a:solidFill>
+                <a:latin typeface="Arial"/>
+              </a:rPr>
+              <a:t>What to build and what to reuse.</a:t>
+            </a:r>
+          </a:p>
+        </p:txBody>
+      </p:sp>
+      <p:sp>
+        <p:nvSpPr>
+          <p:cNvPr id="6" name="Rounded Rectangle 5"/>
+          <p:cNvSpPr/>
+          <p:nvPr/>
+        </p:nvSpPr>
+        <p:spPr>
+          <a:xfrm>
+            <a:off x="8284464" y="1645920"/>
+            <a:ext cx="3246120" cy="3840480"/>
+          </a:xfrm>
+          <a:prstGeom prst="roundRect">
+            <a:avLst>
+              <a:gd name="adj" fmla="val 8000"/>
+            </a:avLst>
+          </a:prstGeom>
+          <a:solidFill>
+            <a:srgbClr val="006E96"/>
+          </a:solidFill>
+          <a:ln>
+            <a:noFill/>
+          </a:ln>
+          <a:effectLst/>
+        </p:spPr>
+        <p:style>
+          <a:lnRef idx="1">
+            <a:schemeClr val="accent1"/>
+          </a:lnRef>
+          <a:fillRef idx="3">
+            <a:schemeClr val="accent1"/>
+          </a:fillRef>
+          <a:effectRef idx="2">
+            <a:schemeClr val="accent1"/>
+          </a:effectRef>
+          <a:fontRef idx="minor">
+            <a:schemeClr val="lt1"/>
+          </a:fontRef>
+        </p:style>
+        <p:txBody>
+          <a:bodyPr rtlCol="0" anchor="t" lIns="128016" rIns="128016" tIns="91440" bIns="54864" wrap="square"/>
+          <a:lstStyle/>
+          <a:p>
+            <a:pPr algn="l">
+              <a:spcAft>
+                <a:spcPts val="300"/>
+              </a:spcAft>
+            </a:pPr>
+            <a:r>
+              <a:rPr sz="1200" b="1" i="0">
+                <a:solidFill>
+                  <a:srgbClr val="FFFFFF"/>
+                </a:solidFill>
+                <a:latin typeface="Arial"/>
+              </a:rPr>
+              <a:t>YOU DECIDE</a:t>
+            </a:r>
+          </a:p>
+          <a:p>
+            <a:pPr algn="l">
+              <a:spcAft>
+                <a:spcPts val="300"/>
+              </a:spcAft>
+            </a:pPr>
+            <a:r>
+              <a:rPr sz="1450" b="0" i="0">
+                <a:solidFill>
+                  <a:srgbClr val="FFFFFF"/>
+                </a:solidFill>
+                <a:latin typeface="Arial"/>
+              </a:rPr>
+              <a:t>Confirm it is what was meant.</a:t>
+            </a:r>
+          </a:p>
+          <a:p>
+            <a:pPr algn="l">
+              <a:spcAft>
+                <a:spcPts val="300"/>
+              </a:spcAft>
+            </a:pPr>
+            <a:r>
+              <a:rPr sz="1450" b="0" i="0">
+                <a:solidFill>
+                  <a:srgbClr val="FFFFFF"/>
+                </a:solidFill>
+                <a:latin typeface="Arial"/>
+              </a:rPr>
+              <a:t>Take the decisions to the Board.</a:t>
+            </a:r>
+          </a:p>
+        </p:txBody>
+      </p:sp>
+      <p:cxnSp>
+        <p:nvCxnSpPr>
+          <p:cNvPr id="7" name="Connector 6"/>
+          <p:cNvCxnSpPr/>
+          <p:nvPr/>
+        </p:nvCxnSpPr>
+        <p:spPr>
+          <a:xfrm>
+            <a:off x="3977639" y="3566160"/>
+            <a:ext cx="420625" cy="0"/>
+          </a:xfrm>
+          <a:prstGeom prst="line">
+            <a:avLst/>
+          </a:prstGeom>
+          <a:ln w="25400">
+            <a:solidFill>
+              <a:srgbClr val="006E96"/>
+            </a:solidFill>
+            <a:tailEnd type="triangle" w="med" len="med"/>
+          </a:ln>
+        </p:spPr>
+        <p:style>
+          <a:lnRef idx="2">
+            <a:schemeClr val="accent1"/>
+          </a:lnRef>
+          <a:fillRef idx="0">
+            <a:schemeClr val="accent1"/>
+          </a:fillRef>
+          <a:effectRef idx="1">
+            <a:schemeClr val="accent1"/>
+          </a:effectRef>
+          <a:fontRef idx="minor">
+            <a:schemeClr val="tx1"/>
+          </a:fontRef>
+        </p:style>
+      </p:cxnSp>
+      <p:cxnSp>
+        <p:nvCxnSpPr>
+          <p:cNvPr id="8" name="Connector 7"/>
+          <p:cNvCxnSpPr/>
+          <p:nvPr/>
+        </p:nvCxnSpPr>
+        <p:spPr>
+          <a:xfrm>
+            <a:off x="7790688" y="3566160"/>
+            <a:ext cx="420624" cy="0"/>
+          </a:xfrm>
+          <a:prstGeom prst="line">
+            <a:avLst/>
+          </a:prstGeom>
+          <a:ln w="25400">
+            <a:solidFill>
+              <a:srgbClr val="006E96"/>
+            </a:solidFill>
+            <a:tailEnd type="triangle" w="med" len="med"/>
+          </a:ln>
+        </p:spPr>
+        <p:style>
+          <a:lnRef idx="2">
+            <a:schemeClr val="accent1"/>
+          </a:lnRef>
+          <a:fillRef idx="0">
+            <a:schemeClr val="accent1"/>
+          </a:fillRef>
+          <a:effectRef idx="1">
+            <a:schemeClr val="accent1"/>
+          </a:effectRef>
+          <a:fontRef idx="minor">
+            <a:schemeClr val="tx1"/>
+          </a:fontRef>
+        </p:style>
+      </p:cxnSp>
+      <p:sp>
+        <p:nvSpPr>
+          <p:cNvPr id="9" name="TextBox 8"/>
           <p:cNvSpPr txBox="1"/>
           <p:nvPr/>
         </p:nvSpPr>
         <p:spPr>
           <a:xfrm>
-            <a:off x="859536" y="4626864"/>
-            <a:ext cx="10479024" cy="1051560"/>
+            <a:off x="658368" y="5760720"/>
+            <a:ext cx="10881360" cy="548640"/>
           </a:xfrm>
           <a:prstGeom prst="rect">
             <a:avLst/>
@@ -12727,13 +13003,8 @@
           </a:bodyPr>
           <a:lstStyle/>
           <a:p>
-            <a:pPr>
-              <a:spcAft>
-                <a:spcPts val="700"/>
-              </a:spcAft>
-            </a:pPr>
-            <a:r>
-              <a:rPr sz="2300" b="1" i="0">
+            <a:r>
+              <a:rPr sz="1550" b="1" i="0">
                 <a:solidFill>
                   <a:srgbClr val="006E96"/>
                 </a:solidFill>
@@ -12746,7 +13017,7 @@
       </p:sp>
       <p:sp>
         <p:nvSpPr>
-          <p:cNvPr id="7" name="TextBox 6"/>
+          <p:cNvPr id="10" name="TextBox 9"/>
           <p:cNvSpPr txBox="1"/>
           <p:nvPr/>
         </p:nvSpPr>
@@ -12876,73 +13147,18 @@
       </p:sp>
       <p:sp>
         <p:nvSpPr>
-          <p:cNvPr id="4" name="TextBox 3"/>
-          <p:cNvSpPr txBox="1"/>
-          <p:nvPr/>
-        </p:nvSpPr>
-        <p:spPr>
-          <a:xfrm>
-            <a:off x="658368" y="1600200"/>
-            <a:ext cx="10881360" cy="2651760"/>
-          </a:xfrm>
-          <a:prstGeom prst="rect">
-            <a:avLst/>
-          </a:prstGeom>
-          <a:noFill/>
-        </p:spPr>
-        <p:txBody>
-          <a:bodyPr wrap="square">
-            <a:spAutoFit/>
-          </a:bodyPr>
-          <a:lstStyle/>
-          <a:p>
-            <a:pPr>
-              <a:spcAft>
-                <a:spcPts val="1200"/>
-              </a:spcAft>
-            </a:pPr>
-            <a:r>
-              <a:rPr sz="2000" b="0" i="0">
-                <a:solidFill>
-                  <a:srgbClr val="1A1A1A"/>
-                </a:solidFill>
-                <a:latin typeface="Arial"/>
-              </a:rPr>
-              <a:t>You paste a technical decision — the Examination Authority will consume the Learner Registry over the data-exchange backbone. The AI returns what it means for the minister and the citizen.</a:t>
-            </a:r>
-          </a:p>
-          <a:p>
-            <a:pPr>
-              <a:spcAft>
-                <a:spcPts val="1200"/>
-              </a:spcAft>
-            </a:pPr>
-            <a:r>
-              <a:rPr sz="2000" b="0" i="0">
-                <a:solidFill>
-                  <a:srgbClr val="1A1A1A"/>
-                </a:solidFill>
-                <a:latin typeface="Arial"/>
-              </a:rPr>
-              <a:t>Parents stop re-entering their child's details. The single learner record becomes possible. The flagship can be delivered.</a:t>
-            </a:r>
-          </a:p>
-        </p:txBody>
-      </p:sp>
-      <p:sp>
-        <p:nvSpPr>
-          <p:cNvPr id="5" name="Rounded Rectangle 4"/>
+          <p:cNvPr id="4" name="Rounded Rectangle 3"/>
           <p:cNvSpPr/>
           <p:nvPr/>
         </p:nvSpPr>
         <p:spPr>
           <a:xfrm>
-            <a:off x="658368" y="4434840"/>
-            <a:ext cx="10881360" cy="1325880"/>
+            <a:off x="658368" y="1645920"/>
+            <a:ext cx="3246120" cy="3840480"/>
           </a:xfrm>
           <a:prstGeom prst="roundRect">
             <a:avLst>
-              <a:gd name="adj" fmla="val 4500"/>
+              <a:gd name="adj" fmla="val 8000"/>
             </a:avLst>
           </a:prstGeom>
           <a:solidFill>
@@ -12968,23 +13184,338 @@
           </a:fontRef>
         </p:style>
         <p:txBody>
-          <a:bodyPr rtlCol="0" anchor="ctr"/>
+          <a:bodyPr rtlCol="0" anchor="t" lIns="128016" rIns="128016" tIns="91440" bIns="54864" wrap="square"/>
           <a:lstStyle/>
           <a:p>
-            <a:pPr algn="ctr"/>
+            <a:pPr algn="l">
+              <a:spcAft>
+                <a:spcPts val="300"/>
+              </a:spcAft>
+            </a:pPr>
+            <a:r>
+              <a:rPr sz="1200" b="1" i="0">
+                <a:solidFill>
+                  <a:srgbClr val="006E96"/>
+                </a:solidFill>
+                <a:latin typeface="Arial"/>
+              </a:rPr>
+              <a:t>YOU PASTE</a:t>
+            </a:r>
+          </a:p>
+          <a:p>
+            <a:pPr algn="l">
+              <a:spcAft>
+                <a:spcPts val="300"/>
+              </a:spcAft>
+            </a:pPr>
+            <a:r>
+              <a:rPr sz="1450" b="0" i="0">
+                <a:solidFill>
+                  <a:srgbClr val="1A1A1A"/>
+                </a:solidFill>
+                <a:latin typeface="Arial"/>
+              </a:rPr>
+              <a:t>A technical decision.</a:t>
+            </a:r>
+          </a:p>
+          <a:p>
+            <a:pPr algn="l">
+              <a:spcAft>
+                <a:spcPts val="300"/>
+              </a:spcAft>
+            </a:pPr>
+            <a:r>
+              <a:rPr sz="1450" b="0" i="0">
+                <a:solidFill>
+                  <a:srgbClr val="1A1A1A"/>
+                </a:solidFill>
+                <a:latin typeface="Arial"/>
+              </a:rPr>
+              <a:t>"The Examination Authority will consume the Learner Registry."</a:t>
+            </a:r>
           </a:p>
         </p:txBody>
       </p:sp>
       <p:sp>
         <p:nvSpPr>
-          <p:cNvPr id="6" name="TextBox 5"/>
+          <p:cNvPr id="5" name="Rounded Rectangle 4"/>
+          <p:cNvSpPr/>
+          <p:nvPr/>
+        </p:nvSpPr>
+        <p:spPr>
+          <a:xfrm>
+            <a:off x="4471416" y="1645920"/>
+            <a:ext cx="3246120" cy="3840480"/>
+          </a:xfrm>
+          <a:prstGeom prst="roundRect">
+            <a:avLst>
+              <a:gd name="adj" fmla="val 8000"/>
+            </a:avLst>
+          </a:prstGeom>
+          <a:solidFill>
+            <a:srgbClr val="F2F2F2"/>
+          </a:solidFill>
+          <a:ln>
+            <a:noFill/>
+          </a:ln>
+          <a:effectLst/>
+        </p:spPr>
+        <p:style>
+          <a:lnRef idx="1">
+            <a:schemeClr val="accent1"/>
+          </a:lnRef>
+          <a:fillRef idx="3">
+            <a:schemeClr val="accent1"/>
+          </a:fillRef>
+          <a:effectRef idx="2">
+            <a:schemeClr val="accent1"/>
+          </a:effectRef>
+          <a:fontRef idx="minor">
+            <a:schemeClr val="lt1"/>
+          </a:fontRef>
+        </p:style>
+        <p:txBody>
+          <a:bodyPr rtlCol="0" anchor="t" lIns="128016" rIns="128016" tIns="91440" bIns="54864" wrap="square"/>
+          <a:lstStyle/>
+          <a:p>
+            <a:pPr algn="l">
+              <a:spcAft>
+                <a:spcPts val="300"/>
+              </a:spcAft>
+            </a:pPr>
+            <a:r>
+              <a:rPr sz="1200" b="1" i="0">
+                <a:solidFill>
+                  <a:srgbClr val="006E96"/>
+                </a:solidFill>
+                <a:latin typeface="Arial"/>
+              </a:rPr>
+              <a:t>THE AI RETURNS</a:t>
+            </a:r>
+          </a:p>
+          <a:p>
+            <a:pPr algn="l">
+              <a:spcAft>
+                <a:spcPts val="300"/>
+              </a:spcAft>
+            </a:pPr>
+            <a:r>
+              <a:rPr sz="1450" b="0" i="0">
+                <a:solidFill>
+                  <a:srgbClr val="1A1A1A"/>
+                </a:solidFill>
+                <a:latin typeface="Arial"/>
+              </a:rPr>
+              <a:t>Parents stop re-entering details.</a:t>
+            </a:r>
+          </a:p>
+          <a:p>
+            <a:pPr algn="l">
+              <a:spcAft>
+                <a:spcPts val="300"/>
+              </a:spcAft>
+            </a:pPr>
+            <a:r>
+              <a:rPr sz="1450" b="0" i="0">
+                <a:solidFill>
+                  <a:srgbClr val="1A1A1A"/>
+                </a:solidFill>
+                <a:latin typeface="Arial"/>
+              </a:rPr>
+              <a:t>The single learner record becomes possible.</a:t>
+            </a:r>
+          </a:p>
+          <a:p>
+            <a:pPr algn="l">
+              <a:spcAft>
+                <a:spcPts val="300"/>
+              </a:spcAft>
+            </a:pPr>
+            <a:r>
+              <a:rPr sz="1450" b="0" i="0">
+                <a:solidFill>
+                  <a:srgbClr val="1A1A1A"/>
+                </a:solidFill>
+                <a:latin typeface="Arial"/>
+              </a:rPr>
+              <a:t>The flagship can be delivered.</a:t>
+            </a:r>
+          </a:p>
+        </p:txBody>
+      </p:sp>
+      <p:sp>
+        <p:nvSpPr>
+          <p:cNvPr id="6" name="Rounded Rectangle 5"/>
+          <p:cNvSpPr/>
+          <p:nvPr/>
+        </p:nvSpPr>
+        <p:spPr>
+          <a:xfrm>
+            <a:off x="8284464" y="1645920"/>
+            <a:ext cx="3246120" cy="3840480"/>
+          </a:xfrm>
+          <a:prstGeom prst="roundRect">
+            <a:avLst>
+              <a:gd name="adj" fmla="val 8000"/>
+            </a:avLst>
+          </a:prstGeom>
+          <a:solidFill>
+            <a:srgbClr val="006E96"/>
+          </a:solidFill>
+          <a:ln>
+            <a:noFill/>
+          </a:ln>
+          <a:effectLst/>
+        </p:spPr>
+        <p:style>
+          <a:lnRef idx="1">
+            <a:schemeClr val="accent1"/>
+          </a:lnRef>
+          <a:fillRef idx="3">
+            <a:schemeClr val="accent1"/>
+          </a:fillRef>
+          <a:effectRef idx="2">
+            <a:schemeClr val="accent1"/>
+          </a:effectRef>
+          <a:fontRef idx="minor">
+            <a:schemeClr val="lt1"/>
+          </a:fontRef>
+        </p:style>
+        <p:txBody>
+          <a:bodyPr rtlCol="0" anchor="t" lIns="128016" rIns="128016" tIns="91440" bIns="54864" wrap="square"/>
+          <a:lstStyle/>
+          <a:p>
+            <a:pPr algn="l">
+              <a:spcAft>
+                <a:spcPts val="300"/>
+              </a:spcAft>
+            </a:pPr>
+            <a:r>
+              <a:rPr sz="1200" b="1" i="0">
+                <a:solidFill>
+                  <a:srgbClr val="FFFFFF"/>
+                </a:solidFill>
+                <a:latin typeface="Arial"/>
+              </a:rPr>
+              <a:t>YOU DECIDE</a:t>
+            </a:r>
+          </a:p>
+          <a:p>
+            <a:pPr algn="l">
+              <a:spcAft>
+                <a:spcPts val="300"/>
+              </a:spcAft>
+            </a:pPr>
+            <a:r>
+              <a:rPr sz="1450" b="0" i="0">
+                <a:solidFill>
+                  <a:srgbClr val="FFFFFF"/>
+                </a:solidFill>
+                <a:latin typeface="Arial"/>
+              </a:rPr>
+              <a:t>Brief the minister in their language.</a:t>
+            </a:r>
+          </a:p>
+          <a:p>
+            <a:pPr algn="l">
+              <a:spcAft>
+                <a:spcPts val="300"/>
+              </a:spcAft>
+            </a:pPr>
+            <a:r>
+              <a:rPr sz="1450" b="0" i="0">
+                <a:solidFill>
+                  <a:srgbClr val="FFFFFF"/>
+                </a:solidFill>
+                <a:latin typeface="Arial"/>
+              </a:rPr>
+              <a:t>Own the trade-offs it carries.</a:t>
+            </a:r>
+          </a:p>
+        </p:txBody>
+      </p:sp>
+      <p:cxnSp>
+        <p:nvCxnSpPr>
+          <p:cNvPr id="7" name="Connector 6"/>
+          <p:cNvCxnSpPr/>
+          <p:nvPr/>
+        </p:nvCxnSpPr>
+        <p:spPr>
+          <a:xfrm>
+            <a:off x="3977639" y="3566160"/>
+            <a:ext cx="420625" cy="0"/>
+          </a:xfrm>
+          <a:prstGeom prst="line">
+            <a:avLst/>
+          </a:prstGeom>
+          <a:ln w="25400">
+            <a:solidFill>
+              <a:srgbClr val="006E96"/>
+            </a:solidFill>
+            <a:tailEnd type="triangle" w="med" len="med"/>
+          </a:ln>
+        </p:spPr>
+        <p:style>
+          <a:lnRef idx="2">
+            <a:schemeClr val="accent1"/>
+          </a:lnRef>
+          <a:fillRef idx="0">
+            <a:schemeClr val="accent1"/>
+          </a:fillRef>
+          <a:effectRef idx="1">
+            <a:schemeClr val="accent1"/>
+          </a:effectRef>
+          <a:fontRef idx="minor">
+            <a:schemeClr val="tx1"/>
+          </a:fontRef>
+        </p:style>
+      </p:cxnSp>
+      <p:cxnSp>
+        <p:nvCxnSpPr>
+          <p:cNvPr id="8" name="Connector 7"/>
+          <p:cNvCxnSpPr/>
+          <p:nvPr/>
+        </p:nvCxnSpPr>
+        <p:spPr>
+          <a:xfrm>
+            <a:off x="7790688" y="3566160"/>
+            <a:ext cx="420624" cy="0"/>
+          </a:xfrm>
+          <a:prstGeom prst="line">
+            <a:avLst/>
+          </a:prstGeom>
+          <a:ln w="25400">
+            <a:solidFill>
+              <a:srgbClr val="006E96"/>
+            </a:solidFill>
+            <a:tailEnd type="triangle" w="med" len="med"/>
+          </a:ln>
+        </p:spPr>
+        <p:style>
+          <a:lnRef idx="2">
+            <a:schemeClr val="accent1"/>
+          </a:lnRef>
+          <a:fillRef idx="0">
+            <a:schemeClr val="accent1"/>
+          </a:fillRef>
+          <a:effectRef idx="1">
+            <a:schemeClr val="accent1"/>
+          </a:effectRef>
+          <a:fontRef idx="minor">
+            <a:schemeClr val="tx1"/>
+          </a:fontRef>
+        </p:style>
+      </p:cxnSp>
+      <p:sp>
+        <p:nvSpPr>
+          <p:cNvPr id="9" name="TextBox 8"/>
           <p:cNvSpPr txBox="1"/>
           <p:nvPr/>
         </p:nvSpPr>
         <p:spPr>
           <a:xfrm>
-            <a:off x="859536" y="4626864"/>
-            <a:ext cx="10479024" cy="1051560"/>
+            <a:off x="658368" y="5760720"/>
+            <a:ext cx="10881360" cy="548640"/>
           </a:xfrm>
           <a:prstGeom prst="rect">
             <a:avLst/>
@@ -12997,13 +13528,8 @@
           </a:bodyPr>
           <a:lstStyle/>
           <a:p>
-            <a:pPr>
-              <a:spcAft>
-                <a:spcPts val="700"/>
-              </a:spcAft>
-            </a:pPr>
-            <a:r>
-              <a:rPr sz="2300" b="1" i="0">
+            <a:r>
+              <a:rPr sz="1550" b="1" i="0">
                 <a:solidFill>
                   <a:srgbClr val="006E96"/>
                 </a:solidFill>
@@ -13016,7 +13542,7 @@
       </p:sp>
       <p:sp>
         <p:nvSpPr>
-          <p:cNvPr id="7" name="TextBox 6"/>
+          <p:cNvPr id="10" name="TextBox 9"/>
           <p:cNvSpPr txBox="1"/>
           <p:nvPr/>
         </p:nvSpPr>
@@ -13729,7 +14255,7 @@
         <p:spPr>
           <a:xfrm>
             <a:off x="658368" y="1600200"/>
-            <a:ext cx="10881360" cy="2651760"/>
+            <a:ext cx="10881360" cy="1673352"/>
           </a:xfrm>
           <a:prstGeom prst="rect">
             <a:avLst/>
@@ -13783,7 +14309,7 @@
         </p:nvSpPr>
         <p:spPr>
           <a:xfrm>
-            <a:off x="658368" y="4434840"/>
+            <a:off x="658368" y="3456432"/>
             <a:ext cx="10881360" cy="1325880"/>
           </a:xfrm>
           <a:prstGeom prst="roundRect">
@@ -13829,7 +14355,7 @@
         </p:nvSpPr>
         <p:spPr>
           <a:xfrm>
-            <a:off x="859536" y="4626864"/>
+            <a:off x="859536" y="3648456"/>
             <a:ext cx="10479024" cy="1051560"/>
           </a:xfrm>
           <a:prstGeom prst="rect">

--- a/10-Knowledge-Products/KP1-GEA/videos/module_5/en/decks/KP1_M5_5.4_Deck_v0.1.pptx
+++ b/10-Knowledge-Products/KP1-GEA/videos/module_5/en/decks/KP1_M5_5.4_Deck_v0.1.pptx
@@ -1003,13 +1003,19 @@
           <a:lstStyle/>
           <a:p>
             <a:r>
-              <a:t>VO, slide 1: The third play addresses the problem at the heart of modern EA work: the business side and the IT side do not share a language. The minister talks outcomes; the architect talks systems. They sit in the same meeting and miss each other. This play is a translator that helps both sides decide together.</a:t>
+              <a:t>VO, slide 1: You have the evidence that it works and the case that it travels. Now the hardest step: getting your minister to commit the team, the mandate and the money. Ministers do not commit to architecture. They commit to outcomes, to numbers, and to cases they can defend in cabinet. So the case you bring cannot be about the architecture. It has to be about three things: the saving, the proof, and the honest cost.</a:t>
             </a:r>
           </a:p>
           <a:p/>
           <a:p>
             <a:r>
-              <a:t>On screen: the play's copy-paste prompt is not shown on a slide — it ships in the video description so the viewer can run it on the other half of the screen.</a:t>
+              <a:t>Retrieval prompt — ask before playing on: of everything in your case, what does a minister actually act on? Answer on the next slide.</a:t>
+            </a:r>
+          </a:p>
+          <a:p/>
+          <a:p>
+            <a:r>
+              <a:t>On screen: the copy-paste prompt is not shown on a slide — it ships in the video description so the viewer can draft the artefact on the other half of the screen.</a:t>
             </a:r>
           </a:p>
         </p:txBody>
@@ -1079,7 +1085,13 @@
           <a:lstStyle/>
           <a:p>
             <a:r>
-              <a:t>VO: First direction: from policy to architecture. You paste the minister's goal in their words — every learner should have one record that follows them through school. The AI returns what that means in architecture terms: the capabilities involved, the services, the data domains, and the decisions it forces — who owns the authoritative learner, which bodies must consume it, what must be built versus reused. The minister's sentence becomes a structured set of architecture decisions, without losing what the minister actually asked for.</a:t>
+              <a:t>VO: Lead with the saving, because that is what a minister can act on. The strongest number you have is the cost of fragmentation: every programme that builds its own identity, its own registry, its own integration, means the country pays many times for one thing. A whole-of-government business case shows that consuming shared building blocks instead would save a meaningful share of the sectoral digital budget over five years. That number — not the four-layer diagram — is what opens a cabinet conversation. The architecture is how you achieve the saving; the saving is what you sell.</a:t>
+            </a:r>
+          </a:p>
+          <a:p/>
+          <a:p>
+            <a:r>
+              <a:t>Production cue: the pivotal slide of this video, and it answers the retrieval prompt set on the title slide. Hold it a beat longer.</a:t>
             </a:r>
           </a:p>
         </p:txBody>
@@ -1149,7 +1161,7 @@
           <a:lstStyle/>
           <a:p>
             <a:r>
-              <a:t>VO: Second direction, just as important: from architecture back to outcomes. You paste a technical decision — the Examination Authority will consume the Learner Registry over the data-exchange backbone. The AI returns what that means for the minister and the citizen: parents stop re-entering their child's details, the single learner record becomes possible, the flagship can be delivered. The architecture stops being a black box the minister has to trust, and becomes a set of choices they can understand and own.</a:t>
+              <a:t>VO: Back the number with the proof, because a minister's first worry is risk. A saving that depends on an untested approach is easy to refuse. A saving backed by four governments that have already built the same pattern is much harder to wave away. So pair the business case with the evidence: this is not an experiment, it is a charted path that countries like yours have walked, with the obstacles documented. You are not asking the minister to bet on a theory. You are asking them to capture a saving that others have already proven is real.</a:t>
             </a:r>
           </a:p>
         </p:txBody>
@@ -1219,7 +1231,7 @@
           <a:lstStyle/>
           <a:p>
             <a:r>
-              <a:t>VO: The play's most useful output is the joint agenda. You give it an operating-model question — should we move to once-only data sharing for education — and it decomposes the decision into three parts: the business decisions only the ministry can make, the technical decisions only the architects can make, and the joint decisions that need both in the room. For each joint decision, it names what each side needs from the other to decide well. That agenda is exactly what an EA Board meeting needs to be productive instead of two groups talking past each other.</a:t>
+              <a:t>VO: Then be honest about the cost and the time, because overselling loses the case the moment a sharp official tests it. Name the real cost: a small permanent team and governance, typically around two per cent of the digital-government budget, sustained for five years. And name the real horizon: about six months to a roadmap the minister can show, but years to full maturity — which means the minister who launches this will likely not be the one who completes it. Said as a weakness, that sinks the case. Said as the truth about serious institution-building, it is what separates a credible proposal from a salesman's. Ministers fund people who tell them the real timeline.</a:t>
             </a:r>
           </a:p>
         </p:txBody>
@@ -1289,13 +1301,7 @@
           <a:lstStyle/>
           <a:p>
             <a:r>
-              <a:t>VO: This is the second great purpose of an EA, made practical. An Enterprise Architecture exists to give the business side and the IT side a shared language for the new work of redesigning services. This play is a tool that does the translating in real time. But a caution: the tool translates; it does not replace the shared vocabulary and the standing forum. The metamodel still has to be agreed, and the Board still has to meet. The play makes the translation faster; the architecture is what makes it stick.</a:t>
-            </a:r>
-          </a:p>
-          <a:p/>
-          <a:p>
-            <a:r>
-              <a:t>Production cue: the pivotal slide of this video. Hold it a beat longer.</a:t>
+              <a:t>VO: Put it on one page, in that order. The saving — the country-level number over five years. The proof — the governments that have done it. The ask — a small permanent team, a board with real authority, around two per cent of the digital budget, and a promise to protect the team. And the horizon — six months to a roadmap, then a sustained practice. Saving, proof, ask, horizon. That single page turns a technical request the minister would defer into a business case they can defend in cabinet.</a:t>
             </a:r>
           </a:p>
         </p:txBody>
@@ -1365,7 +1371,7 @@
           <a:lstStyle/>
           <a:p>
             <a:r>
-              <a:t>VO: So the third play is a translator between the minister and the architects. Goal to architecture, architecture to outcome, and the joint agenda that gets both sides deciding together. It is the shared-language job an EA exists to do — with a tool that makes it happen in the meeting, not just in theory.</a:t>
+              <a:t>VO: So winning the commitment is not an architecture conversation. It is a one-page business case: the saving, the proof, the ask, the honest horizon. Bring that, and you give your minister something they can say yes to and defend afterwards. Bring a diagram of four layers, and you give them something to admire and postpone.</a:t>
             </a:r>
           </a:p>
         </p:txBody>
@@ -11710,7 +11716,7 @@
                 </a:solidFill>
                 <a:latin typeface="Arial"/>
               </a:rPr>
-              <a:t>5.4 — Play 3 — Translate between the minister and the architects</a:t>
+              <a:t>5.4 — Win the commitment — the business case that gets your minister to yes</a:t>
             </a:r>
           </a:p>
         </p:txBody>
@@ -11826,7 +11832,7 @@
                 </a:solidFill>
                 <a:latin typeface="Arial"/>
               </a:rPr>
-              <a:t>The third play is a translator — it turns a minister's policy goal into architecture terms and a joint agenda, and architecture decisions back into outcomes a minister understands — so the business side and the IT side can actually decide together.</a:t>
+              <a:t>Winning the minister's commitment is not about the architecture — it is about the number. Pair the whole-of-government re-use saving with the proven evidence and an honest time horizon, and you turn a technical case into one a minister can take to cabinet.</a:t>
             </a:r>
           </a:p>
         </p:txBody>
@@ -11923,7 +11929,7 @@
                 </a:solidFill>
                 <a:latin typeface="Arial"/>
               </a:rPr>
-              <a:t>Chief architect · senior architect · sector ICT lead</a:t>
+              <a:t>Director-general · head of a sectoral ICT unit · technical secretary</a:t>
             </a:r>
           </a:p>
         </p:txBody>
@@ -12001,7 +12007,7 @@
                 </a:solidFill>
                 <a:latin typeface="Arial"/>
               </a:rPr>
-              <a:t>THE FIVE PLAYS THIS MODULE TEACHES</a:t>
+              <a:t>THE CASE YOU CARRY INTO THE ROOM</a:t>
             </a:r>
           </a:p>
         </p:txBody>
@@ -12056,7 +12062,7 @@
                 </a:solidFill>
                 <a:latin typeface="Arial"/>
               </a:rPr>
-              <a:t>Play 1 — Discovery and Assess</a:t>
+              <a:t>Proven — four real governments</a:t>
             </a:r>
           </a:p>
         </p:txBody>
@@ -12111,7 +12117,7 @@
                 </a:solidFill>
                 <a:latin typeface="Arial"/>
               </a:rPr>
-              <a:t>Play 2 — the re-use business case</a:t>
+              <a:t>Portable — sector after sector</a:t>
             </a:r>
           </a:p>
         </p:txBody>
@@ -12166,7 +12172,7 @@
                 </a:solidFill>
                 <a:latin typeface="Arial"/>
               </a:rPr>
-              <a:t>Play 3 — minister and architects</a:t>
+              <a:t>The commitment — the one page</a:t>
             </a:r>
           </a:p>
         </p:txBody>
@@ -12221,7 +12227,7 @@
                 </a:solidFill>
                 <a:latin typeface="Arial"/>
               </a:rPr>
-              <a:t>Play 4 — the governance artefacts</a:t>
+              <a:t>The capability — your own people</a:t>
             </a:r>
           </a:p>
         </p:txBody>
@@ -12276,7 +12282,7 @@
                 </a:solidFill>
                 <a:latin typeface="Arial"/>
               </a:rPr>
-              <a:t>Play 5 — comparators and transfer</a:t>
+              <a:t>Necessary now, not just useful</a:t>
             </a:r>
           </a:p>
         </p:txBody>
@@ -12310,7 +12316,7 @@
                 </a:solidFill>
                 <a:latin typeface="Arial"/>
               </a:rPr>
-              <a:t>4-part prompt · 5 plays · 4 safeguards · you decide, the AI drafts</a:t>
+              <a:t>4 governments · 4 killers to design out · 1 page for the minister</a:t>
             </a:r>
           </a:p>
         </p:txBody>
@@ -12435,7 +12441,7 @@
                 </a:solidFill>
                 <a:latin typeface="Arial"/>
               </a:rPr>
-              <a:t>Play 3 — Translate between the minister and the architects</a:t>
+              <a:t>Win the commitment — the business case that gets your minister to yes</a:t>
             </a:r>
           </a:p>
         </p:txBody>
@@ -12469,7 +12475,7 @@
                 </a:solidFill>
                 <a:latin typeface="Arial"/>
               </a:rPr>
-              <a:t>The third play is a translator — it turns a minister's policy goal into architecture terms and a joint agenda, and architecture decisions back into outcomes a minister understands — so the business side and the IT side can actually decide together.</a:t>
+              <a:t>Winning the minister's commitment is not about the architecture — it is about the number. Pair the whole-of-government re-use saving with the proven evidence and an honest time horizon, and you turn a technical case into one a minister can take to cabinet.</a:t>
             </a:r>
           </a:p>
         </p:txBody>
@@ -12599,25 +12605,80 @@
                 </a:solidFill>
                 <a:latin typeface="Arial"/>
               </a:rPr>
-              <a:t>From the minister's sentence to the decisions it forces</a:t>
-            </a:r>
-          </a:p>
-        </p:txBody>
-      </p:sp>
-      <p:sp>
-        <p:nvSpPr>
-          <p:cNvPr id="4" name="Rounded Rectangle 3"/>
+              <a:t>Lead with the saving, not the architecture</a:t>
+            </a:r>
+          </a:p>
+        </p:txBody>
+      </p:sp>
+      <p:sp>
+        <p:nvSpPr>
+          <p:cNvPr id="4" name="TextBox 3"/>
+          <p:cNvSpPr txBox="1"/>
+          <p:nvPr/>
+        </p:nvSpPr>
+        <p:spPr>
+          <a:xfrm>
+            <a:off x="658368" y="1600200"/>
+            <a:ext cx="10881360" cy="2651760"/>
+          </a:xfrm>
+          <a:prstGeom prst="rect">
+            <a:avLst/>
+          </a:prstGeom>
+          <a:noFill/>
+        </p:spPr>
+        <p:txBody>
+          <a:bodyPr wrap="square">
+            <a:spAutoFit/>
+          </a:bodyPr>
+          <a:lstStyle/>
+          <a:p>
+            <a:pPr>
+              <a:spcAft>
+                <a:spcPts val="1200"/>
+              </a:spcAft>
+            </a:pPr>
+            <a:r>
+              <a:rPr sz="2000" b="0" i="0">
+                <a:solidFill>
+                  <a:srgbClr val="1A1A1A"/>
+                </a:solidFill>
+                <a:latin typeface="Arial"/>
+              </a:rPr>
+              <a:t>The strongest number you have is the cost of fragmentation: every programme that builds its own identity, its own registry, its own integration means the country pays many times for one thing.</a:t>
+            </a:r>
+          </a:p>
+          <a:p>
+            <a:pPr>
+              <a:spcAft>
+                <a:spcPts val="1200"/>
+              </a:spcAft>
+            </a:pPr>
+            <a:r>
+              <a:rPr sz="2000" b="0" i="0">
+                <a:solidFill>
+                  <a:srgbClr val="1A1A1A"/>
+                </a:solidFill>
+                <a:latin typeface="Arial"/>
+              </a:rPr>
+              <a:t>A whole-of-government business case shows that consuming shared building blocks instead would save a meaningful share of the sectoral digital budget over five years. That number, not the four-layer diagram, opens a cabinet conversation.</a:t>
+            </a:r>
+          </a:p>
+        </p:txBody>
+      </p:sp>
+      <p:sp>
+        <p:nvSpPr>
+          <p:cNvPr id="5" name="Rounded Rectangle 4"/>
           <p:cNvSpPr/>
           <p:nvPr/>
         </p:nvSpPr>
         <p:spPr>
           <a:xfrm>
-            <a:off x="658368" y="1645920"/>
-            <a:ext cx="3246120" cy="3840480"/>
+            <a:off x="658368" y="4434840"/>
+            <a:ext cx="10881360" cy="1325880"/>
           </a:xfrm>
           <a:prstGeom prst="roundRect">
             <a:avLst>
-              <a:gd name="adj" fmla="val 8000"/>
+              <a:gd name="adj" fmla="val 4500"/>
             </a:avLst>
           </a:prstGeom>
           <a:solidFill>
@@ -12643,381 +12704,55 @@
           </a:fontRef>
         </p:style>
         <p:txBody>
-          <a:bodyPr rtlCol="0" anchor="t" lIns="128016" rIns="128016" tIns="91440" bIns="54864" wrap="square"/>
+          <a:bodyPr rtlCol="0" anchor="ctr"/>
           <a:lstStyle/>
           <a:p>
-            <a:pPr algn="l">
+            <a:pPr algn="ctr"/>
+          </a:p>
+        </p:txBody>
+      </p:sp>
+      <p:sp>
+        <p:nvSpPr>
+          <p:cNvPr id="6" name="TextBox 5"/>
+          <p:cNvSpPr txBox="1"/>
+          <p:nvPr/>
+        </p:nvSpPr>
+        <p:spPr>
+          <a:xfrm>
+            <a:off x="859536" y="4626864"/>
+            <a:ext cx="10479024" cy="1051560"/>
+          </a:xfrm>
+          <a:prstGeom prst="rect">
+            <a:avLst/>
+          </a:prstGeom>
+          <a:noFill/>
+        </p:spPr>
+        <p:txBody>
+          <a:bodyPr wrap="square">
+            <a:spAutoFit/>
+          </a:bodyPr>
+          <a:lstStyle/>
+          <a:p>
+            <a:pPr>
               <a:spcAft>
-                <a:spcPts val="300"/>
+                <a:spcPts val="700"/>
               </a:spcAft>
             </a:pPr>
             <a:r>
-              <a:rPr sz="1200" b="1" i="0">
+              <a:rPr sz="2300" b="1" i="0">
                 <a:solidFill>
                   <a:srgbClr val="006E96"/>
                 </a:solidFill>
                 <a:latin typeface="Arial"/>
               </a:rPr>
-              <a:t>YOU PASTE</a:t>
-            </a:r>
-          </a:p>
-          <a:p>
-            <a:pPr algn="l">
-              <a:spcAft>
-                <a:spcPts val="300"/>
-              </a:spcAft>
-            </a:pPr>
-            <a:r>
-              <a:rPr sz="1450" b="0" i="0">
-                <a:solidFill>
-                  <a:srgbClr val="1A1A1A"/>
-                </a:solidFill>
-                <a:latin typeface="Arial"/>
-              </a:rPr>
-              <a:t>The minister's goal, in their own words.</a:t>
-            </a:r>
-          </a:p>
-          <a:p>
-            <a:pPr algn="l">
-              <a:spcAft>
-                <a:spcPts val="300"/>
-              </a:spcAft>
-            </a:pPr>
-            <a:r>
-              <a:rPr sz="1450" b="0" i="0">
-                <a:solidFill>
-                  <a:srgbClr val="1A1A1A"/>
-                </a:solidFill>
-                <a:latin typeface="Arial"/>
-              </a:rPr>
-              <a:t>"Every learner should have one record that follows them through school."</a:t>
-            </a:r>
-          </a:p>
-        </p:txBody>
-      </p:sp>
-      <p:sp>
-        <p:nvSpPr>
-          <p:cNvPr id="5" name="Rounded Rectangle 4"/>
-          <p:cNvSpPr/>
-          <p:nvPr/>
-        </p:nvSpPr>
-        <p:spPr>
-          <a:xfrm>
-            <a:off x="4471416" y="1645920"/>
-            <a:ext cx="3246120" cy="3840480"/>
-          </a:xfrm>
-          <a:prstGeom prst="roundRect">
-            <a:avLst>
-              <a:gd name="adj" fmla="val 8000"/>
-            </a:avLst>
-          </a:prstGeom>
-          <a:solidFill>
-            <a:srgbClr val="F2F2F2"/>
-          </a:solidFill>
-          <a:ln>
-            <a:noFill/>
-          </a:ln>
-          <a:effectLst/>
-        </p:spPr>
-        <p:style>
-          <a:lnRef idx="1">
-            <a:schemeClr val="accent1"/>
-          </a:lnRef>
-          <a:fillRef idx="3">
-            <a:schemeClr val="accent1"/>
-          </a:fillRef>
-          <a:effectRef idx="2">
-            <a:schemeClr val="accent1"/>
-          </a:effectRef>
-          <a:fontRef idx="minor">
-            <a:schemeClr val="lt1"/>
-          </a:fontRef>
-        </p:style>
-        <p:txBody>
-          <a:bodyPr rtlCol="0" anchor="t" lIns="128016" rIns="128016" tIns="91440" bIns="54864" wrap="square"/>
-          <a:lstStyle/>
-          <a:p>
-            <a:pPr algn="l">
-              <a:spcAft>
-                <a:spcPts val="300"/>
-              </a:spcAft>
-            </a:pPr>
-            <a:r>
-              <a:rPr sz="1200" b="1" i="0">
-                <a:solidFill>
-                  <a:srgbClr val="006E96"/>
-                </a:solidFill>
-                <a:latin typeface="Arial"/>
-              </a:rPr>
-              <a:t>THE AI RETURNS</a:t>
-            </a:r>
-          </a:p>
-          <a:p>
-            <a:pPr algn="l">
-              <a:spcAft>
-                <a:spcPts val="300"/>
-              </a:spcAft>
-            </a:pPr>
-            <a:r>
-              <a:rPr sz="1450" b="0" i="0">
-                <a:solidFill>
-                  <a:srgbClr val="1A1A1A"/>
-                </a:solidFill>
-                <a:latin typeface="Arial"/>
-              </a:rPr>
-              <a:t>The capabilities it implies.</a:t>
-            </a:r>
-          </a:p>
-          <a:p>
-            <a:pPr algn="l">
-              <a:spcAft>
-                <a:spcPts val="300"/>
-              </a:spcAft>
-            </a:pPr>
-            <a:r>
-              <a:rPr sz="1450" b="0" i="0">
-                <a:solidFill>
-                  <a:srgbClr val="1A1A1A"/>
-                </a:solidFill>
-                <a:latin typeface="Arial"/>
-              </a:rPr>
-              <a:t>The services and the data domains.</a:t>
-            </a:r>
-          </a:p>
-          <a:p>
-            <a:pPr algn="l">
-              <a:spcAft>
-                <a:spcPts val="300"/>
-              </a:spcAft>
-            </a:pPr>
-            <a:r>
-              <a:rPr sz="1450" b="0" i="0">
-                <a:solidFill>
-                  <a:srgbClr val="1A1A1A"/>
-                </a:solidFill>
-                <a:latin typeface="Arial"/>
-              </a:rPr>
-              <a:t>Who owns the authoritative learner.</a:t>
-            </a:r>
-          </a:p>
-          <a:p>
-            <a:pPr algn="l">
-              <a:spcAft>
-                <a:spcPts val="300"/>
-              </a:spcAft>
-            </a:pPr>
-            <a:r>
-              <a:rPr sz="1450" b="0" i="0">
-                <a:solidFill>
-                  <a:srgbClr val="1A1A1A"/>
-                </a:solidFill>
-                <a:latin typeface="Arial"/>
-              </a:rPr>
-              <a:t>What to build and what to reuse.</a:t>
-            </a:r>
-          </a:p>
-        </p:txBody>
-      </p:sp>
-      <p:sp>
-        <p:nvSpPr>
-          <p:cNvPr id="6" name="Rounded Rectangle 5"/>
-          <p:cNvSpPr/>
-          <p:nvPr/>
-        </p:nvSpPr>
-        <p:spPr>
-          <a:xfrm>
-            <a:off x="8284464" y="1645920"/>
-            <a:ext cx="3246120" cy="3840480"/>
-          </a:xfrm>
-          <a:prstGeom prst="roundRect">
-            <a:avLst>
-              <a:gd name="adj" fmla="val 8000"/>
-            </a:avLst>
-          </a:prstGeom>
-          <a:solidFill>
-            <a:srgbClr val="006E96"/>
-          </a:solidFill>
-          <a:ln>
-            <a:noFill/>
-          </a:ln>
-          <a:effectLst/>
-        </p:spPr>
-        <p:style>
-          <a:lnRef idx="1">
-            <a:schemeClr val="accent1"/>
-          </a:lnRef>
-          <a:fillRef idx="3">
-            <a:schemeClr val="accent1"/>
-          </a:fillRef>
-          <a:effectRef idx="2">
-            <a:schemeClr val="accent1"/>
-          </a:effectRef>
-          <a:fontRef idx="minor">
-            <a:schemeClr val="lt1"/>
-          </a:fontRef>
-        </p:style>
-        <p:txBody>
-          <a:bodyPr rtlCol="0" anchor="t" lIns="128016" rIns="128016" tIns="91440" bIns="54864" wrap="square"/>
-          <a:lstStyle/>
-          <a:p>
-            <a:pPr algn="l">
-              <a:spcAft>
-                <a:spcPts val="300"/>
-              </a:spcAft>
-            </a:pPr>
-            <a:r>
-              <a:rPr sz="1200" b="1" i="0">
-                <a:solidFill>
-                  <a:srgbClr val="FFFFFF"/>
-                </a:solidFill>
-                <a:latin typeface="Arial"/>
-              </a:rPr>
-              <a:t>YOU DECIDE</a:t>
-            </a:r>
-          </a:p>
-          <a:p>
-            <a:pPr algn="l">
-              <a:spcAft>
-                <a:spcPts val="300"/>
-              </a:spcAft>
-            </a:pPr>
-            <a:r>
-              <a:rPr sz="1450" b="0" i="0">
-                <a:solidFill>
-                  <a:srgbClr val="FFFFFF"/>
-                </a:solidFill>
-                <a:latin typeface="Arial"/>
-              </a:rPr>
-              <a:t>Confirm it is what was meant.</a:t>
-            </a:r>
-          </a:p>
-          <a:p>
-            <a:pPr algn="l">
-              <a:spcAft>
-                <a:spcPts val="300"/>
-              </a:spcAft>
-            </a:pPr>
-            <a:r>
-              <a:rPr sz="1450" b="0" i="0">
-                <a:solidFill>
-                  <a:srgbClr val="FFFFFF"/>
-                </a:solidFill>
-                <a:latin typeface="Arial"/>
-              </a:rPr>
-              <a:t>Take the decisions to the Board.</a:t>
-            </a:r>
-          </a:p>
-        </p:txBody>
-      </p:sp>
-      <p:cxnSp>
-        <p:nvCxnSpPr>
-          <p:cNvPr id="7" name="Connector 6"/>
-          <p:cNvCxnSpPr/>
-          <p:nvPr/>
-        </p:nvCxnSpPr>
-        <p:spPr>
-          <a:xfrm>
-            <a:off x="3977639" y="3566160"/>
-            <a:ext cx="420625" cy="0"/>
-          </a:xfrm>
-          <a:prstGeom prst="line">
-            <a:avLst/>
-          </a:prstGeom>
-          <a:ln w="25400">
-            <a:solidFill>
-              <a:srgbClr val="006E96"/>
-            </a:solidFill>
-            <a:tailEnd type="triangle" w="med" len="med"/>
-          </a:ln>
-        </p:spPr>
-        <p:style>
-          <a:lnRef idx="2">
-            <a:schemeClr val="accent1"/>
-          </a:lnRef>
-          <a:fillRef idx="0">
-            <a:schemeClr val="accent1"/>
-          </a:fillRef>
-          <a:effectRef idx="1">
-            <a:schemeClr val="accent1"/>
-          </a:effectRef>
-          <a:fontRef idx="minor">
-            <a:schemeClr val="tx1"/>
-          </a:fontRef>
-        </p:style>
-      </p:cxnSp>
-      <p:cxnSp>
-        <p:nvCxnSpPr>
-          <p:cNvPr id="8" name="Connector 7"/>
-          <p:cNvCxnSpPr/>
-          <p:nvPr/>
-        </p:nvCxnSpPr>
-        <p:spPr>
-          <a:xfrm>
-            <a:off x="7790688" y="3566160"/>
-            <a:ext cx="420624" cy="0"/>
-          </a:xfrm>
-          <a:prstGeom prst="line">
-            <a:avLst/>
-          </a:prstGeom>
-          <a:ln w="25400">
-            <a:solidFill>
-              <a:srgbClr val="006E96"/>
-            </a:solidFill>
-            <a:tailEnd type="triangle" w="med" len="med"/>
-          </a:ln>
-        </p:spPr>
-        <p:style>
-          <a:lnRef idx="2">
-            <a:schemeClr val="accent1"/>
-          </a:lnRef>
-          <a:fillRef idx="0">
-            <a:schemeClr val="accent1"/>
-          </a:fillRef>
-          <a:effectRef idx="1">
-            <a:schemeClr val="accent1"/>
-          </a:effectRef>
-          <a:fontRef idx="minor">
-            <a:schemeClr val="tx1"/>
-          </a:fontRef>
-        </p:style>
-      </p:cxnSp>
-      <p:sp>
-        <p:nvSpPr>
-          <p:cNvPr id="9" name="TextBox 8"/>
-          <p:cNvSpPr txBox="1"/>
-          <p:nvPr/>
-        </p:nvSpPr>
-        <p:spPr>
-          <a:xfrm>
-            <a:off x="658368" y="5760720"/>
-            <a:ext cx="10881360" cy="548640"/>
-          </a:xfrm>
-          <a:prstGeom prst="rect">
-            <a:avLst/>
-          </a:prstGeom>
-          <a:noFill/>
-        </p:spPr>
-        <p:txBody>
-          <a:bodyPr wrap="square">
-            <a:spAutoFit/>
-          </a:bodyPr>
-          <a:lstStyle/>
-          <a:p>
-            <a:r>
-              <a:rPr sz="1550" b="1" i="0">
-                <a:solidFill>
-                  <a:srgbClr val="006E96"/>
-                </a:solidFill>
-                <a:latin typeface="Arial"/>
-              </a:rPr>
-              <a:t>Architecture decisions, without losing what the minister actually asked for.</a:t>
-            </a:r>
-          </a:p>
-        </p:txBody>
-      </p:sp>
-      <p:sp>
-        <p:nvSpPr>
-          <p:cNvPr id="10" name="TextBox 9"/>
+              <a:t>The architecture is how you achieve the saving. The saving is what you sell.</a:t>
+            </a:r>
+          </a:p>
+        </p:txBody>
+      </p:sp>
+      <p:sp>
+        <p:nvSpPr>
+          <p:cNvPr id="7" name="TextBox 6"/>
           <p:cNvSpPr txBox="1"/>
           <p:nvPr/>
         </p:nvSpPr>
@@ -13044,7 +12779,7 @@
                 </a:solidFill>
                 <a:latin typeface="Arial"/>
               </a:rPr>
-              <a:t>5.4 · Play 3 — Translate between the minister and the architects</a:t>
+              <a:t>5.4 · Win the commitment — the business case that gets your minister to yes</a:t>
             </a:r>
           </a:p>
         </p:txBody>
@@ -13140,25 +12875,80 @@
                 </a:solidFill>
                 <a:latin typeface="Arial"/>
               </a:rPr>
-              <a:t>And back the other way — from a technical decision to what a parent notices</a:t>
-            </a:r>
-          </a:p>
-        </p:txBody>
-      </p:sp>
-      <p:sp>
-        <p:nvSpPr>
-          <p:cNvPr id="4" name="Rounded Rectangle 3"/>
+              <a:t>Back the number with the proof, because a minister's first worry is risk</a:t>
+            </a:r>
+          </a:p>
+        </p:txBody>
+      </p:sp>
+      <p:sp>
+        <p:nvSpPr>
+          <p:cNvPr id="4" name="TextBox 3"/>
+          <p:cNvSpPr txBox="1"/>
+          <p:nvPr/>
+        </p:nvSpPr>
+        <p:spPr>
+          <a:xfrm>
+            <a:off x="658368" y="1600200"/>
+            <a:ext cx="10881360" cy="2651760"/>
+          </a:xfrm>
+          <a:prstGeom prst="rect">
+            <a:avLst/>
+          </a:prstGeom>
+          <a:noFill/>
+        </p:spPr>
+        <p:txBody>
+          <a:bodyPr wrap="square">
+            <a:spAutoFit/>
+          </a:bodyPr>
+          <a:lstStyle/>
+          <a:p>
+            <a:pPr>
+              <a:spcAft>
+                <a:spcPts val="1200"/>
+              </a:spcAft>
+            </a:pPr>
+            <a:r>
+              <a:rPr sz="2000" b="0" i="0">
+                <a:solidFill>
+                  <a:srgbClr val="1A1A1A"/>
+                </a:solidFill>
+                <a:latin typeface="Arial"/>
+              </a:rPr>
+              <a:t>A saving that depends on an untested approach is easy to refuse. A saving backed by four governments that have already built the same pattern is much harder to wave away.</a:t>
+            </a:r>
+          </a:p>
+          <a:p>
+            <a:pPr>
+              <a:spcAft>
+                <a:spcPts val="1200"/>
+              </a:spcAft>
+            </a:pPr>
+            <a:r>
+              <a:rPr sz="2000" b="0" i="0">
+                <a:solidFill>
+                  <a:srgbClr val="1A1A1A"/>
+                </a:solidFill>
+                <a:latin typeface="Arial"/>
+              </a:rPr>
+              <a:t>This is a charted path that countries like yours have walked, with the obstacles documented.</a:t>
+            </a:r>
+          </a:p>
+        </p:txBody>
+      </p:sp>
+      <p:sp>
+        <p:nvSpPr>
+          <p:cNvPr id="5" name="Rounded Rectangle 4"/>
           <p:cNvSpPr/>
           <p:nvPr/>
         </p:nvSpPr>
         <p:spPr>
           <a:xfrm>
-            <a:off x="658368" y="1645920"/>
-            <a:ext cx="3246120" cy="3840480"/>
+            <a:off x="658368" y="4434840"/>
+            <a:ext cx="10881360" cy="1325880"/>
           </a:xfrm>
           <a:prstGeom prst="roundRect">
             <a:avLst>
-              <a:gd name="adj" fmla="val 8000"/>
+              <a:gd name="adj" fmla="val 4500"/>
             </a:avLst>
           </a:prstGeom>
           <a:solidFill>
@@ -13184,365 +12974,55 @@
           </a:fontRef>
         </p:style>
         <p:txBody>
-          <a:bodyPr rtlCol="0" anchor="t" lIns="128016" rIns="128016" tIns="91440" bIns="54864" wrap="square"/>
+          <a:bodyPr rtlCol="0" anchor="ctr"/>
           <a:lstStyle/>
           <a:p>
-            <a:pPr algn="l">
+            <a:pPr algn="ctr"/>
+          </a:p>
+        </p:txBody>
+      </p:sp>
+      <p:sp>
+        <p:nvSpPr>
+          <p:cNvPr id="6" name="TextBox 5"/>
+          <p:cNvSpPr txBox="1"/>
+          <p:nvPr/>
+        </p:nvSpPr>
+        <p:spPr>
+          <a:xfrm>
+            <a:off x="859536" y="4626864"/>
+            <a:ext cx="10479024" cy="1051560"/>
+          </a:xfrm>
+          <a:prstGeom prst="rect">
+            <a:avLst/>
+          </a:prstGeom>
+          <a:noFill/>
+        </p:spPr>
+        <p:txBody>
+          <a:bodyPr wrap="square">
+            <a:spAutoFit/>
+          </a:bodyPr>
+          <a:lstStyle/>
+          <a:p>
+            <a:pPr>
               <a:spcAft>
-                <a:spcPts val="300"/>
+                <a:spcPts val="700"/>
               </a:spcAft>
             </a:pPr>
             <a:r>
-              <a:rPr sz="1200" b="1" i="0">
+              <a:rPr sz="2300" b="1" i="0">
                 <a:solidFill>
                   <a:srgbClr val="006E96"/>
                 </a:solidFill>
                 <a:latin typeface="Arial"/>
               </a:rPr>
-              <a:t>YOU PASTE</a:t>
-            </a:r>
-          </a:p>
-          <a:p>
-            <a:pPr algn="l">
-              <a:spcAft>
-                <a:spcPts val="300"/>
-              </a:spcAft>
-            </a:pPr>
-            <a:r>
-              <a:rPr sz="1450" b="0" i="0">
-                <a:solidFill>
-                  <a:srgbClr val="1A1A1A"/>
-                </a:solidFill>
-                <a:latin typeface="Arial"/>
-              </a:rPr>
-              <a:t>A technical decision.</a:t>
-            </a:r>
-          </a:p>
-          <a:p>
-            <a:pPr algn="l">
-              <a:spcAft>
-                <a:spcPts val="300"/>
-              </a:spcAft>
-            </a:pPr>
-            <a:r>
-              <a:rPr sz="1450" b="0" i="0">
-                <a:solidFill>
-                  <a:srgbClr val="1A1A1A"/>
-                </a:solidFill>
-                <a:latin typeface="Arial"/>
-              </a:rPr>
-              <a:t>"The Examination Authority will consume the Learner Registry."</a:t>
-            </a:r>
-          </a:p>
-        </p:txBody>
-      </p:sp>
-      <p:sp>
-        <p:nvSpPr>
-          <p:cNvPr id="5" name="Rounded Rectangle 4"/>
-          <p:cNvSpPr/>
-          <p:nvPr/>
-        </p:nvSpPr>
-        <p:spPr>
-          <a:xfrm>
-            <a:off x="4471416" y="1645920"/>
-            <a:ext cx="3246120" cy="3840480"/>
-          </a:xfrm>
-          <a:prstGeom prst="roundRect">
-            <a:avLst>
-              <a:gd name="adj" fmla="val 8000"/>
-            </a:avLst>
-          </a:prstGeom>
-          <a:solidFill>
-            <a:srgbClr val="F2F2F2"/>
-          </a:solidFill>
-          <a:ln>
-            <a:noFill/>
-          </a:ln>
-          <a:effectLst/>
-        </p:spPr>
-        <p:style>
-          <a:lnRef idx="1">
-            <a:schemeClr val="accent1"/>
-          </a:lnRef>
-          <a:fillRef idx="3">
-            <a:schemeClr val="accent1"/>
-          </a:fillRef>
-          <a:effectRef idx="2">
-            <a:schemeClr val="accent1"/>
-          </a:effectRef>
-          <a:fontRef idx="minor">
-            <a:schemeClr val="lt1"/>
-          </a:fontRef>
-        </p:style>
-        <p:txBody>
-          <a:bodyPr rtlCol="0" anchor="t" lIns="128016" rIns="128016" tIns="91440" bIns="54864" wrap="square"/>
-          <a:lstStyle/>
-          <a:p>
-            <a:pPr algn="l">
-              <a:spcAft>
-                <a:spcPts val="300"/>
-              </a:spcAft>
-            </a:pPr>
-            <a:r>
-              <a:rPr sz="1200" b="1" i="0">
-                <a:solidFill>
-                  <a:srgbClr val="006E96"/>
-                </a:solidFill>
-                <a:latin typeface="Arial"/>
-              </a:rPr>
-              <a:t>THE AI RETURNS</a:t>
-            </a:r>
-          </a:p>
-          <a:p>
-            <a:pPr algn="l">
-              <a:spcAft>
-                <a:spcPts val="300"/>
-              </a:spcAft>
-            </a:pPr>
-            <a:r>
-              <a:rPr sz="1450" b="0" i="0">
-                <a:solidFill>
-                  <a:srgbClr val="1A1A1A"/>
-                </a:solidFill>
-                <a:latin typeface="Arial"/>
-              </a:rPr>
-              <a:t>Parents stop re-entering details.</a:t>
-            </a:r>
-          </a:p>
-          <a:p>
-            <a:pPr algn="l">
-              <a:spcAft>
-                <a:spcPts val="300"/>
-              </a:spcAft>
-            </a:pPr>
-            <a:r>
-              <a:rPr sz="1450" b="0" i="0">
-                <a:solidFill>
-                  <a:srgbClr val="1A1A1A"/>
-                </a:solidFill>
-                <a:latin typeface="Arial"/>
-              </a:rPr>
-              <a:t>The single learner record becomes possible.</a:t>
-            </a:r>
-          </a:p>
-          <a:p>
-            <a:pPr algn="l">
-              <a:spcAft>
-                <a:spcPts val="300"/>
-              </a:spcAft>
-            </a:pPr>
-            <a:r>
-              <a:rPr sz="1450" b="0" i="0">
-                <a:solidFill>
-                  <a:srgbClr val="1A1A1A"/>
-                </a:solidFill>
-                <a:latin typeface="Arial"/>
-              </a:rPr>
-              <a:t>The flagship can be delivered.</a:t>
-            </a:r>
-          </a:p>
-        </p:txBody>
-      </p:sp>
-      <p:sp>
-        <p:nvSpPr>
-          <p:cNvPr id="6" name="Rounded Rectangle 5"/>
-          <p:cNvSpPr/>
-          <p:nvPr/>
-        </p:nvSpPr>
-        <p:spPr>
-          <a:xfrm>
-            <a:off x="8284464" y="1645920"/>
-            <a:ext cx="3246120" cy="3840480"/>
-          </a:xfrm>
-          <a:prstGeom prst="roundRect">
-            <a:avLst>
-              <a:gd name="adj" fmla="val 8000"/>
-            </a:avLst>
-          </a:prstGeom>
-          <a:solidFill>
-            <a:srgbClr val="006E96"/>
-          </a:solidFill>
-          <a:ln>
-            <a:noFill/>
-          </a:ln>
-          <a:effectLst/>
-        </p:spPr>
-        <p:style>
-          <a:lnRef idx="1">
-            <a:schemeClr val="accent1"/>
-          </a:lnRef>
-          <a:fillRef idx="3">
-            <a:schemeClr val="accent1"/>
-          </a:fillRef>
-          <a:effectRef idx="2">
-            <a:schemeClr val="accent1"/>
-          </a:effectRef>
-          <a:fontRef idx="minor">
-            <a:schemeClr val="lt1"/>
-          </a:fontRef>
-        </p:style>
-        <p:txBody>
-          <a:bodyPr rtlCol="0" anchor="t" lIns="128016" rIns="128016" tIns="91440" bIns="54864" wrap="square"/>
-          <a:lstStyle/>
-          <a:p>
-            <a:pPr algn="l">
-              <a:spcAft>
-                <a:spcPts val="300"/>
-              </a:spcAft>
-            </a:pPr>
-            <a:r>
-              <a:rPr sz="1200" b="1" i="0">
-                <a:solidFill>
-                  <a:srgbClr val="FFFFFF"/>
-                </a:solidFill>
-                <a:latin typeface="Arial"/>
-              </a:rPr>
-              <a:t>YOU DECIDE</a:t>
-            </a:r>
-          </a:p>
-          <a:p>
-            <a:pPr algn="l">
-              <a:spcAft>
-                <a:spcPts val="300"/>
-              </a:spcAft>
-            </a:pPr>
-            <a:r>
-              <a:rPr sz="1450" b="0" i="0">
-                <a:solidFill>
-                  <a:srgbClr val="FFFFFF"/>
-                </a:solidFill>
-                <a:latin typeface="Arial"/>
-              </a:rPr>
-              <a:t>Brief the minister in their language.</a:t>
-            </a:r>
-          </a:p>
-          <a:p>
-            <a:pPr algn="l">
-              <a:spcAft>
-                <a:spcPts val="300"/>
-              </a:spcAft>
-            </a:pPr>
-            <a:r>
-              <a:rPr sz="1450" b="0" i="0">
-                <a:solidFill>
-                  <a:srgbClr val="FFFFFF"/>
-                </a:solidFill>
-                <a:latin typeface="Arial"/>
-              </a:rPr>
-              <a:t>Own the trade-offs it carries.</a:t>
-            </a:r>
-          </a:p>
-        </p:txBody>
-      </p:sp>
-      <p:cxnSp>
-        <p:nvCxnSpPr>
-          <p:cNvPr id="7" name="Connector 6"/>
-          <p:cNvCxnSpPr/>
-          <p:nvPr/>
-        </p:nvCxnSpPr>
-        <p:spPr>
-          <a:xfrm>
-            <a:off x="3977639" y="3566160"/>
-            <a:ext cx="420625" cy="0"/>
-          </a:xfrm>
-          <a:prstGeom prst="line">
-            <a:avLst/>
-          </a:prstGeom>
-          <a:ln w="25400">
-            <a:solidFill>
-              <a:srgbClr val="006E96"/>
-            </a:solidFill>
-            <a:tailEnd type="triangle" w="med" len="med"/>
-          </a:ln>
-        </p:spPr>
-        <p:style>
-          <a:lnRef idx="2">
-            <a:schemeClr val="accent1"/>
-          </a:lnRef>
-          <a:fillRef idx="0">
-            <a:schemeClr val="accent1"/>
-          </a:fillRef>
-          <a:effectRef idx="1">
-            <a:schemeClr val="accent1"/>
-          </a:effectRef>
-          <a:fontRef idx="minor">
-            <a:schemeClr val="tx1"/>
-          </a:fontRef>
-        </p:style>
-      </p:cxnSp>
-      <p:cxnSp>
-        <p:nvCxnSpPr>
-          <p:cNvPr id="8" name="Connector 7"/>
-          <p:cNvCxnSpPr/>
-          <p:nvPr/>
-        </p:nvCxnSpPr>
-        <p:spPr>
-          <a:xfrm>
-            <a:off x="7790688" y="3566160"/>
-            <a:ext cx="420624" cy="0"/>
-          </a:xfrm>
-          <a:prstGeom prst="line">
-            <a:avLst/>
-          </a:prstGeom>
-          <a:ln w="25400">
-            <a:solidFill>
-              <a:srgbClr val="006E96"/>
-            </a:solidFill>
-            <a:tailEnd type="triangle" w="med" len="med"/>
-          </a:ln>
-        </p:spPr>
-        <p:style>
-          <a:lnRef idx="2">
-            <a:schemeClr val="accent1"/>
-          </a:lnRef>
-          <a:fillRef idx="0">
-            <a:schemeClr val="accent1"/>
-          </a:fillRef>
-          <a:effectRef idx="1">
-            <a:schemeClr val="accent1"/>
-          </a:effectRef>
-          <a:fontRef idx="minor">
-            <a:schemeClr val="tx1"/>
-          </a:fontRef>
-        </p:style>
-      </p:cxnSp>
-      <p:sp>
-        <p:nvSpPr>
-          <p:cNvPr id="9" name="TextBox 8"/>
-          <p:cNvSpPr txBox="1"/>
-          <p:nvPr/>
-        </p:nvSpPr>
-        <p:spPr>
-          <a:xfrm>
-            <a:off x="658368" y="5760720"/>
-            <a:ext cx="10881360" cy="548640"/>
-          </a:xfrm>
-          <a:prstGeom prst="rect">
-            <a:avLst/>
-          </a:prstGeom>
-          <a:noFill/>
-        </p:spPr>
-        <p:txBody>
-          <a:bodyPr wrap="square">
-            <a:spAutoFit/>
-          </a:bodyPr>
-          <a:lstStyle/>
-          <a:p>
-            <a:r>
-              <a:rPr sz="1550" b="1" i="0">
-                <a:solidFill>
-                  <a:srgbClr val="006E96"/>
-                </a:solidFill>
-                <a:latin typeface="Arial"/>
-              </a:rPr>
-              <a:t>The architecture stops being a black box the minister has to trust.</a:t>
-            </a:r>
-          </a:p>
-        </p:txBody>
-      </p:sp>
-      <p:sp>
-        <p:nvSpPr>
-          <p:cNvPr id="10" name="TextBox 9"/>
+              <a:t>Not a bet on a theory — a saving others have already proven is real.</a:t>
+            </a:r>
+          </a:p>
+        </p:txBody>
+      </p:sp>
+      <p:sp>
+        <p:nvSpPr>
+          <p:cNvPr id="7" name="TextBox 6"/>
           <p:cNvSpPr txBox="1"/>
           <p:nvPr/>
         </p:nvSpPr>
@@ -13569,7 +13049,7 @@
                 </a:solidFill>
                 <a:latin typeface="Arial"/>
               </a:rPr>
-              <a:t>5.4 · Play 3 — Translate between the minister and the architects</a:t>
+              <a:t>5.4 · Win the commitment — the business case that gets your minister to yes</a:t>
             </a:r>
           </a:p>
         </p:txBody>
@@ -13665,27 +13145,84 @@
                 </a:solidFill>
                 <a:latin typeface="Arial"/>
               </a:rPr>
-              <a:t>The most useful output is the joint agenda</a:t>
-            </a:r>
-          </a:p>
-        </p:txBody>
-      </p:sp>
-      <p:sp>
-        <p:nvSpPr>
-          <p:cNvPr id="4" name="Oval 3"/>
+              <a:t>Ministers fund people who tell them the real timeline</a:t>
+            </a:r>
+          </a:p>
+        </p:txBody>
+      </p:sp>
+      <p:sp>
+        <p:nvSpPr>
+          <p:cNvPr id="4" name="TextBox 3"/>
+          <p:cNvSpPr txBox="1"/>
+          <p:nvPr/>
+        </p:nvSpPr>
+        <p:spPr>
+          <a:xfrm>
+            <a:off x="658368" y="1600200"/>
+            <a:ext cx="10881360" cy="2651760"/>
+          </a:xfrm>
+          <a:prstGeom prst="rect">
+            <a:avLst/>
+          </a:prstGeom>
+          <a:noFill/>
+        </p:spPr>
+        <p:txBody>
+          <a:bodyPr wrap="square">
+            <a:spAutoFit/>
+          </a:bodyPr>
+          <a:lstStyle/>
+          <a:p>
+            <a:pPr>
+              <a:spcAft>
+                <a:spcPts val="1200"/>
+              </a:spcAft>
+            </a:pPr>
+            <a:r>
+              <a:rPr sz="2000" b="0" i="0">
+                <a:solidFill>
+                  <a:srgbClr val="1A1A1A"/>
+                </a:solidFill>
+                <a:latin typeface="Arial"/>
+              </a:rPr>
+              <a:t>Name the real cost: a small permanent team and governance, typically around two per cent of the digital-government budget, sustained for five years.</a:t>
+            </a:r>
+          </a:p>
+          <a:p>
+            <a:pPr>
+              <a:spcAft>
+                <a:spcPts val="1200"/>
+              </a:spcAft>
+            </a:pPr>
+            <a:r>
+              <a:rPr sz="2000" b="0" i="0">
+                <a:solidFill>
+                  <a:srgbClr val="1A1A1A"/>
+                </a:solidFill>
+                <a:latin typeface="Arial"/>
+              </a:rPr>
+              <a:t>And the real horizon: about six months to a roadmap the minister can show, but years to full maturity — so the minister who launches this will likely not be the one who completes it.</a:t>
+            </a:r>
+          </a:p>
+        </p:txBody>
+      </p:sp>
+      <p:sp>
+        <p:nvSpPr>
+          <p:cNvPr id="5" name="Rounded Rectangle 4"/>
           <p:cNvSpPr/>
           <p:nvPr/>
         </p:nvSpPr>
         <p:spPr>
           <a:xfrm>
-            <a:off x="621792" y="1508760"/>
-            <a:ext cx="310896" cy="310896"/>
-          </a:xfrm>
-          <a:prstGeom prst="ellipse">
-            <a:avLst/>
+            <a:off x="658368" y="4434840"/>
+            <a:ext cx="10881360" cy="1325880"/>
+          </a:xfrm>
+          <a:prstGeom prst="roundRect">
+            <a:avLst>
+              <a:gd name="adj" fmla="val 4500"/>
+            </a:avLst>
           </a:prstGeom>
           <a:solidFill>
-            <a:srgbClr val="009CD6"/>
+            <a:srgbClr val="E5F5FB"/>
           </a:solidFill>
           <a:ln>
             <a:noFill/>
@@ -13707,32 +13244,23 @@
           </a:fontRef>
         </p:style>
         <p:txBody>
-          <a:bodyPr rtlCol="0" anchor="ctr" lIns="0" rIns="0" tIns="0" bIns="0" wrap="square"/>
+          <a:bodyPr rtlCol="0" anchor="ctr"/>
           <a:lstStyle/>
           <a:p>
             <a:pPr algn="ctr"/>
-            <a:r>
-              <a:rPr sz="1300" b="1" i="0">
-                <a:solidFill>
-                  <a:srgbClr val="FFFFFF"/>
-                </a:solidFill>
-                <a:latin typeface="Arial"/>
-              </a:rPr>
-              <a:t>1</a:t>
-            </a:r>
-          </a:p>
-        </p:txBody>
-      </p:sp>
-      <p:sp>
-        <p:nvSpPr>
-          <p:cNvPr id="5" name="TextBox 4"/>
+          </a:p>
+        </p:txBody>
+      </p:sp>
+      <p:sp>
+        <p:nvSpPr>
+          <p:cNvPr id="6" name="TextBox 5"/>
           <p:cNvSpPr txBox="1"/>
           <p:nvPr/>
         </p:nvSpPr>
         <p:spPr>
           <a:xfrm>
-            <a:off x="1115568" y="1463040"/>
-            <a:ext cx="10527487" cy="1386839"/>
+            <a:off x="859536" y="4626864"/>
+            <a:ext cx="10479024" cy="1051560"/>
           </a:xfrm>
           <a:prstGeom prst="rect">
             <a:avLst/>
@@ -13747,378 +13275,24 @@
           <a:p>
             <a:pPr>
               <a:spcAft>
-                <a:spcPts val="300"/>
+                <a:spcPts val="700"/>
               </a:spcAft>
             </a:pPr>
             <a:r>
-              <a:rPr sz="1900" b="1" i="0">
-                <a:solidFill>
-                  <a:srgbClr val="1A1A1A"/>
-                </a:solidFill>
-                <a:latin typeface="Arial"/>
-              </a:rPr>
-              <a:t>Business decisions only the ministry can make</a:t>
-            </a:r>
-          </a:p>
-          <a:p>
-            <a:pPr>
-              <a:spcAft>
-                <a:spcPts val="300"/>
-              </a:spcAft>
-            </a:pPr>
-            <a:r>
-              <a:rPr sz="1550" b="0" i="0">
-                <a:solidFill>
-                  <a:srgbClr val="595959"/>
-                </a:solidFill>
-                <a:latin typeface="Arial"/>
-              </a:rPr>
-              <a:t>Policy, legal, who owns what.</a:t>
-            </a:r>
-          </a:p>
-        </p:txBody>
-      </p:sp>
-      <p:sp>
-        <p:nvSpPr>
-          <p:cNvPr id="6" name="Rectangle 5"/>
-          <p:cNvSpPr/>
-          <p:nvPr/>
-        </p:nvSpPr>
-        <p:spPr>
-          <a:xfrm>
-            <a:off x="621792" y="2854452"/>
-            <a:ext cx="10881360" cy="12700"/>
-          </a:xfrm>
-          <a:prstGeom prst="rect">
-            <a:avLst/>
-          </a:prstGeom>
-          <a:solidFill>
-            <a:srgbClr val="DDECF4"/>
-          </a:solidFill>
-          <a:ln>
-            <a:noFill/>
-          </a:ln>
-          <a:effectLst/>
-        </p:spPr>
-        <p:style>
-          <a:lnRef idx="1">
-            <a:schemeClr val="accent1"/>
-          </a:lnRef>
-          <a:fillRef idx="3">
-            <a:schemeClr val="accent1"/>
-          </a:fillRef>
-          <a:effectRef idx="2">
-            <a:schemeClr val="accent1"/>
-          </a:effectRef>
-          <a:fontRef idx="minor">
-            <a:schemeClr val="lt1"/>
-          </a:fontRef>
-        </p:style>
-        <p:txBody>
-          <a:bodyPr rtlCol="0" anchor="ctr"/>
-          <a:lstStyle/>
-          <a:p>
-            <a:pPr algn="ctr"/>
-          </a:p>
-        </p:txBody>
-      </p:sp>
-      <p:sp>
-        <p:nvSpPr>
-          <p:cNvPr id="7" name="Oval 6"/>
-          <p:cNvSpPr/>
-          <p:nvPr/>
-        </p:nvSpPr>
-        <p:spPr>
-          <a:xfrm>
-            <a:off x="621792" y="2941319"/>
-            <a:ext cx="310896" cy="310896"/>
-          </a:xfrm>
-          <a:prstGeom prst="ellipse">
-            <a:avLst/>
-          </a:prstGeom>
-          <a:solidFill>
-            <a:srgbClr val="009CD6"/>
-          </a:solidFill>
-          <a:ln>
-            <a:noFill/>
-          </a:ln>
-          <a:effectLst/>
-        </p:spPr>
-        <p:style>
-          <a:lnRef idx="1">
-            <a:schemeClr val="accent1"/>
-          </a:lnRef>
-          <a:fillRef idx="3">
-            <a:schemeClr val="accent1"/>
-          </a:fillRef>
-          <a:effectRef idx="2">
-            <a:schemeClr val="accent1"/>
-          </a:effectRef>
-          <a:fontRef idx="minor">
-            <a:schemeClr val="lt1"/>
-          </a:fontRef>
-        </p:style>
-        <p:txBody>
-          <a:bodyPr rtlCol="0" anchor="ctr" lIns="0" rIns="0" tIns="0" bIns="0" wrap="square"/>
-          <a:lstStyle/>
-          <a:p>
-            <a:pPr algn="ctr"/>
-            <a:r>
-              <a:rPr sz="1300" b="1" i="0">
-                <a:solidFill>
-                  <a:srgbClr val="FFFFFF"/>
-                </a:solidFill>
-                <a:latin typeface="Arial"/>
-              </a:rPr>
-              <a:t>2</a:t>
-            </a:r>
-          </a:p>
-        </p:txBody>
-      </p:sp>
-      <p:sp>
-        <p:nvSpPr>
-          <p:cNvPr id="8" name="TextBox 7"/>
-          <p:cNvSpPr txBox="1"/>
-          <p:nvPr/>
-        </p:nvSpPr>
-        <p:spPr>
-          <a:xfrm>
-            <a:off x="1115568" y="2895600"/>
-            <a:ext cx="10527487" cy="1386839"/>
-          </a:xfrm>
-          <a:prstGeom prst="rect">
-            <a:avLst/>
-          </a:prstGeom>
-          <a:noFill/>
-        </p:spPr>
-        <p:txBody>
-          <a:bodyPr wrap="square">
-            <a:spAutoFit/>
-          </a:bodyPr>
-          <a:lstStyle/>
-          <a:p>
-            <a:pPr>
-              <a:spcAft>
-                <a:spcPts val="300"/>
-              </a:spcAft>
-            </a:pPr>
-            <a:r>
-              <a:rPr sz="1900" b="1" i="0">
-                <a:solidFill>
-                  <a:srgbClr val="1A1A1A"/>
-                </a:solidFill>
-                <a:latin typeface="Arial"/>
-              </a:rPr>
-              <a:t>Technical decisions only the architects can make</a:t>
-            </a:r>
-          </a:p>
-          <a:p>
-            <a:pPr>
-              <a:spcAft>
-                <a:spcPts val="300"/>
-              </a:spcAft>
-            </a:pPr>
-            <a:r>
-              <a:rPr sz="1550" b="0" i="0">
-                <a:solidFill>
-                  <a:srgbClr val="595959"/>
-                </a:solidFill>
-                <a:latin typeface="Arial"/>
-              </a:rPr>
-              <a:t>Technology choice, security model, integration pattern.</a:t>
-            </a:r>
-          </a:p>
-        </p:txBody>
-      </p:sp>
-      <p:sp>
-        <p:nvSpPr>
-          <p:cNvPr id="9" name="Rectangle 8"/>
-          <p:cNvSpPr/>
-          <p:nvPr/>
-        </p:nvSpPr>
-        <p:spPr>
-          <a:xfrm>
-            <a:off x="621792" y="4287011"/>
-            <a:ext cx="10881360" cy="12700"/>
-          </a:xfrm>
-          <a:prstGeom prst="rect">
-            <a:avLst/>
-          </a:prstGeom>
-          <a:solidFill>
-            <a:srgbClr val="DDECF4"/>
-          </a:solidFill>
-          <a:ln>
-            <a:noFill/>
-          </a:ln>
-          <a:effectLst/>
-        </p:spPr>
-        <p:style>
-          <a:lnRef idx="1">
-            <a:schemeClr val="accent1"/>
-          </a:lnRef>
-          <a:fillRef idx="3">
-            <a:schemeClr val="accent1"/>
-          </a:fillRef>
-          <a:effectRef idx="2">
-            <a:schemeClr val="accent1"/>
-          </a:effectRef>
-          <a:fontRef idx="minor">
-            <a:schemeClr val="lt1"/>
-          </a:fontRef>
-        </p:style>
-        <p:txBody>
-          <a:bodyPr rtlCol="0" anchor="ctr"/>
-          <a:lstStyle/>
-          <a:p>
-            <a:pPr algn="ctr"/>
-          </a:p>
-        </p:txBody>
-      </p:sp>
-      <p:sp>
-        <p:nvSpPr>
-          <p:cNvPr id="10" name="Oval 9"/>
-          <p:cNvSpPr/>
-          <p:nvPr/>
-        </p:nvSpPr>
-        <p:spPr>
-          <a:xfrm>
-            <a:off x="621792" y="4373879"/>
-            <a:ext cx="310896" cy="310896"/>
-          </a:xfrm>
-          <a:prstGeom prst="ellipse">
-            <a:avLst/>
-          </a:prstGeom>
-          <a:solidFill>
-            <a:srgbClr val="009CD6"/>
-          </a:solidFill>
-          <a:ln>
-            <a:noFill/>
-          </a:ln>
-          <a:effectLst/>
-        </p:spPr>
-        <p:style>
-          <a:lnRef idx="1">
-            <a:schemeClr val="accent1"/>
-          </a:lnRef>
-          <a:fillRef idx="3">
-            <a:schemeClr val="accent1"/>
-          </a:fillRef>
-          <a:effectRef idx="2">
-            <a:schemeClr val="accent1"/>
-          </a:effectRef>
-          <a:fontRef idx="minor">
-            <a:schemeClr val="lt1"/>
-          </a:fontRef>
-        </p:style>
-        <p:txBody>
-          <a:bodyPr rtlCol="0" anchor="ctr" lIns="0" rIns="0" tIns="0" bIns="0" wrap="square"/>
-          <a:lstStyle/>
-          <a:p>
-            <a:pPr algn="ctr"/>
-            <a:r>
-              <a:rPr sz="1300" b="1" i="0">
-                <a:solidFill>
-                  <a:srgbClr val="FFFFFF"/>
-                </a:solidFill>
-                <a:latin typeface="Arial"/>
-              </a:rPr>
-              <a:t>3</a:t>
-            </a:r>
-          </a:p>
-        </p:txBody>
-      </p:sp>
-      <p:sp>
-        <p:nvSpPr>
-          <p:cNvPr id="11" name="TextBox 10"/>
-          <p:cNvSpPr txBox="1"/>
-          <p:nvPr/>
-        </p:nvSpPr>
-        <p:spPr>
-          <a:xfrm>
-            <a:off x="1115568" y="4328159"/>
-            <a:ext cx="10527487" cy="1386839"/>
-          </a:xfrm>
-          <a:prstGeom prst="rect">
-            <a:avLst/>
-          </a:prstGeom>
-          <a:noFill/>
-        </p:spPr>
-        <p:txBody>
-          <a:bodyPr wrap="square">
-            <a:spAutoFit/>
-          </a:bodyPr>
-          <a:lstStyle/>
-          <a:p>
-            <a:pPr>
-              <a:spcAft>
-                <a:spcPts val="300"/>
-              </a:spcAft>
-            </a:pPr>
-            <a:r>
-              <a:rPr sz="1900" b="1" i="0">
-                <a:solidFill>
-                  <a:srgbClr val="1A1A1A"/>
-                </a:solidFill>
-                <a:latin typeface="Arial"/>
-              </a:rPr>
-              <a:t>Joint decisions that need both in the room</a:t>
-            </a:r>
-          </a:p>
-          <a:p>
-            <a:pPr>
-              <a:spcAft>
-                <a:spcPts val="300"/>
-              </a:spcAft>
-            </a:pPr>
-            <a:r>
-              <a:rPr sz="1550" b="0" i="0">
-                <a:solidFill>
-                  <a:srgbClr val="595959"/>
-                </a:solidFill>
-                <a:latin typeface="Arial"/>
-              </a:rPr>
-              <a:t>Named in plain language, with what each side needs from the other to decide well.</a:t>
-            </a:r>
-          </a:p>
-        </p:txBody>
-      </p:sp>
-      <p:sp>
-        <p:nvSpPr>
-          <p:cNvPr id="12" name="TextBox 11"/>
-          <p:cNvSpPr txBox="1"/>
-          <p:nvPr/>
-        </p:nvSpPr>
-        <p:spPr>
-          <a:xfrm>
-            <a:off x="658368" y="5870448"/>
-            <a:ext cx="10881360" cy="548640"/>
-          </a:xfrm>
-          <a:prstGeom prst="rect">
-            <a:avLst/>
-          </a:prstGeom>
-          <a:noFill/>
-        </p:spPr>
-        <p:txBody>
-          <a:bodyPr wrap="square">
-            <a:spAutoFit/>
-          </a:bodyPr>
-          <a:lstStyle/>
-          <a:p>
-            <a:r>
-              <a:rPr sz="1550" b="1" i="0">
+              <a:rPr sz="2300" b="1" i="0">
                 <a:solidFill>
                   <a:srgbClr val="006E96"/>
                 </a:solidFill>
                 <a:latin typeface="Arial"/>
               </a:rPr>
-              <a:t>Exactly what an EA Board meeting needs, instead of two groups talking past each other.</a:t>
-            </a:r>
-          </a:p>
-        </p:txBody>
-      </p:sp>
-      <p:sp>
-        <p:nvSpPr>
-          <p:cNvPr id="13" name="TextBox 12"/>
+              <a:t>Said as a weakness, that sinks the case. Said as the truth, it wins it.</a:t>
+            </a:r>
+          </a:p>
+        </p:txBody>
+      </p:sp>
+      <p:sp>
+        <p:nvSpPr>
+          <p:cNvPr id="7" name="TextBox 6"/>
           <p:cNvSpPr txBox="1"/>
           <p:nvPr/>
         </p:nvSpPr>
@@ -14145,7 +13319,7 @@
                 </a:solidFill>
                 <a:latin typeface="Arial"/>
               </a:rPr>
-              <a:t>5.4 · Play 3 — Translate between the minister and the architects</a:t>
+              <a:t>5.4 · Win the commitment — the business case that gets your minister to yes</a:t>
             </a:r>
           </a:p>
         </p:txBody>
@@ -14241,84 +13415,27 @@
                 </a:solidFill>
                 <a:latin typeface="Arial"/>
               </a:rPr>
-              <a:t>The tool translates. The architecture is what makes it stick</a:t>
-            </a:r>
-          </a:p>
-        </p:txBody>
-      </p:sp>
-      <p:sp>
-        <p:nvSpPr>
-          <p:cNvPr id="4" name="TextBox 3"/>
-          <p:cNvSpPr txBox="1"/>
+              <a:t>The one page, in the order a minister reads it</a:t>
+            </a:r>
+          </a:p>
+        </p:txBody>
+      </p:sp>
+      <p:sp>
+        <p:nvSpPr>
+          <p:cNvPr id="4" name="Oval 3"/>
+          <p:cNvSpPr/>
           <p:nvPr/>
         </p:nvSpPr>
         <p:spPr>
           <a:xfrm>
-            <a:off x="658368" y="1600200"/>
-            <a:ext cx="10881360" cy="1673352"/>
-          </a:xfrm>
-          <a:prstGeom prst="rect">
+            <a:off x="621792" y="1508760"/>
+            <a:ext cx="310896" cy="310896"/>
+          </a:xfrm>
+          <a:prstGeom prst="ellipse">
             <a:avLst/>
           </a:prstGeom>
-          <a:noFill/>
-        </p:spPr>
-        <p:txBody>
-          <a:bodyPr wrap="square">
-            <a:spAutoFit/>
-          </a:bodyPr>
-          <a:lstStyle/>
-          <a:p>
-            <a:pPr>
-              <a:spcAft>
-                <a:spcPts val="1200"/>
-              </a:spcAft>
-            </a:pPr>
-            <a:r>
-              <a:rPr sz="2000" b="0" i="0">
-                <a:solidFill>
-                  <a:srgbClr val="1A1A1A"/>
-                </a:solidFill>
-                <a:latin typeface="Arial"/>
-              </a:rPr>
-              <a:t>An Enterprise Architecture exists to give the business side and the IT side a shared language for the new work of redesigning services. This play does the translating in real time — in the meeting, not just in theory.</a:t>
-            </a:r>
-          </a:p>
-          <a:p>
-            <a:pPr>
-              <a:spcAft>
-                <a:spcPts val="1200"/>
-              </a:spcAft>
-            </a:pPr>
-            <a:r>
-              <a:rPr sz="2000" b="0" i="0">
-                <a:solidFill>
-                  <a:srgbClr val="1A1A1A"/>
-                </a:solidFill>
-                <a:latin typeface="Arial"/>
-              </a:rPr>
-              <a:t>But it does not replace the shared vocabulary or the standing forum.</a:t>
-            </a:r>
-          </a:p>
-        </p:txBody>
-      </p:sp>
-      <p:sp>
-        <p:nvSpPr>
-          <p:cNvPr id="5" name="Rounded Rectangle 4"/>
-          <p:cNvSpPr/>
-          <p:nvPr/>
-        </p:nvSpPr>
-        <p:spPr>
-          <a:xfrm>
-            <a:off x="658368" y="3456432"/>
-            <a:ext cx="10881360" cy="1325880"/>
-          </a:xfrm>
-          <a:prstGeom prst="roundRect">
-            <a:avLst>
-              <a:gd name="adj" fmla="val 4500"/>
-            </a:avLst>
-          </a:prstGeom>
           <a:solidFill>
-            <a:srgbClr val="E5F5FB"/>
+            <a:srgbClr val="009CD6"/>
           </a:solidFill>
           <a:ln>
             <a:noFill/>
@@ -14340,23 +13457,32 @@
           </a:fontRef>
         </p:style>
         <p:txBody>
-          <a:bodyPr rtlCol="0" anchor="ctr"/>
+          <a:bodyPr rtlCol="0" anchor="ctr" lIns="0" rIns="0" tIns="0" bIns="0" wrap="square"/>
           <a:lstStyle/>
           <a:p>
             <a:pPr algn="ctr"/>
-          </a:p>
-        </p:txBody>
-      </p:sp>
-      <p:sp>
-        <p:nvSpPr>
-          <p:cNvPr id="6" name="TextBox 5"/>
+            <a:r>
+              <a:rPr sz="1300" b="1" i="0">
+                <a:solidFill>
+                  <a:srgbClr val="FFFFFF"/>
+                </a:solidFill>
+                <a:latin typeface="Arial"/>
+              </a:rPr>
+              <a:t>1</a:t>
+            </a:r>
+          </a:p>
+        </p:txBody>
+      </p:sp>
+      <p:sp>
+        <p:nvSpPr>
+          <p:cNvPr id="5" name="TextBox 4"/>
           <p:cNvSpPr txBox="1"/>
           <p:nvPr/>
         </p:nvSpPr>
         <p:spPr>
           <a:xfrm>
-            <a:off x="859536" y="3648456"/>
-            <a:ext cx="10479024" cy="1051560"/>
+            <a:off x="1115568" y="1463040"/>
+            <a:ext cx="10527487" cy="1028699"/>
           </a:xfrm>
           <a:prstGeom prst="rect">
             <a:avLst/>
@@ -14371,24 +13497,530 @@
           <a:p>
             <a:pPr>
               <a:spcAft>
-                <a:spcPts val="700"/>
+                <a:spcPts val="300"/>
               </a:spcAft>
             </a:pPr>
             <a:r>
-              <a:rPr sz="2300" b="1" i="0">
+              <a:rPr sz="1900" b="1" i="0">
+                <a:solidFill>
+                  <a:srgbClr val="1A1A1A"/>
+                </a:solidFill>
+                <a:latin typeface="Arial"/>
+              </a:rPr>
+              <a:t>The saving</a:t>
+            </a:r>
+          </a:p>
+          <a:p>
+            <a:pPr>
+              <a:spcAft>
+                <a:spcPts val="300"/>
+              </a:spcAft>
+            </a:pPr>
+            <a:r>
+              <a:rPr sz="1550" b="0" i="0">
+                <a:solidFill>
+                  <a:srgbClr val="595959"/>
+                </a:solidFill>
+                <a:latin typeface="Arial"/>
+              </a:rPr>
+              <a:t>The country-level number over five years.</a:t>
+            </a:r>
+          </a:p>
+        </p:txBody>
+      </p:sp>
+      <p:sp>
+        <p:nvSpPr>
+          <p:cNvPr id="6" name="Rectangle 5"/>
+          <p:cNvSpPr/>
+          <p:nvPr/>
+        </p:nvSpPr>
+        <p:spPr>
+          <a:xfrm>
+            <a:off x="621792" y="2496312"/>
+            <a:ext cx="10881360" cy="12700"/>
+          </a:xfrm>
+          <a:prstGeom prst="rect">
+            <a:avLst/>
+          </a:prstGeom>
+          <a:solidFill>
+            <a:srgbClr val="DDECF4"/>
+          </a:solidFill>
+          <a:ln>
+            <a:noFill/>
+          </a:ln>
+          <a:effectLst/>
+        </p:spPr>
+        <p:style>
+          <a:lnRef idx="1">
+            <a:schemeClr val="accent1"/>
+          </a:lnRef>
+          <a:fillRef idx="3">
+            <a:schemeClr val="accent1"/>
+          </a:fillRef>
+          <a:effectRef idx="2">
+            <a:schemeClr val="accent1"/>
+          </a:effectRef>
+          <a:fontRef idx="minor">
+            <a:schemeClr val="lt1"/>
+          </a:fontRef>
+        </p:style>
+        <p:txBody>
+          <a:bodyPr rtlCol="0" anchor="ctr"/>
+          <a:lstStyle/>
+          <a:p>
+            <a:pPr algn="ctr"/>
+          </a:p>
+        </p:txBody>
+      </p:sp>
+      <p:sp>
+        <p:nvSpPr>
+          <p:cNvPr id="7" name="Oval 6"/>
+          <p:cNvSpPr/>
+          <p:nvPr/>
+        </p:nvSpPr>
+        <p:spPr>
+          <a:xfrm>
+            <a:off x="621792" y="2583179"/>
+            <a:ext cx="310896" cy="310896"/>
+          </a:xfrm>
+          <a:prstGeom prst="ellipse">
+            <a:avLst/>
+          </a:prstGeom>
+          <a:solidFill>
+            <a:srgbClr val="009CD6"/>
+          </a:solidFill>
+          <a:ln>
+            <a:noFill/>
+          </a:ln>
+          <a:effectLst/>
+        </p:spPr>
+        <p:style>
+          <a:lnRef idx="1">
+            <a:schemeClr val="accent1"/>
+          </a:lnRef>
+          <a:fillRef idx="3">
+            <a:schemeClr val="accent1"/>
+          </a:fillRef>
+          <a:effectRef idx="2">
+            <a:schemeClr val="accent1"/>
+          </a:effectRef>
+          <a:fontRef idx="minor">
+            <a:schemeClr val="lt1"/>
+          </a:fontRef>
+        </p:style>
+        <p:txBody>
+          <a:bodyPr rtlCol="0" anchor="ctr" lIns="0" rIns="0" tIns="0" bIns="0" wrap="square"/>
+          <a:lstStyle/>
+          <a:p>
+            <a:pPr algn="ctr"/>
+            <a:r>
+              <a:rPr sz="1300" b="1" i="0">
+                <a:solidFill>
+                  <a:srgbClr val="FFFFFF"/>
+                </a:solidFill>
+                <a:latin typeface="Arial"/>
+              </a:rPr>
+              <a:t>2</a:t>
+            </a:r>
+          </a:p>
+        </p:txBody>
+      </p:sp>
+      <p:sp>
+        <p:nvSpPr>
+          <p:cNvPr id="8" name="TextBox 7"/>
+          <p:cNvSpPr txBox="1"/>
+          <p:nvPr/>
+        </p:nvSpPr>
+        <p:spPr>
+          <a:xfrm>
+            <a:off x="1115568" y="2537460"/>
+            <a:ext cx="10527487" cy="1028699"/>
+          </a:xfrm>
+          <a:prstGeom prst="rect">
+            <a:avLst/>
+          </a:prstGeom>
+          <a:noFill/>
+        </p:spPr>
+        <p:txBody>
+          <a:bodyPr wrap="square">
+            <a:spAutoFit/>
+          </a:bodyPr>
+          <a:lstStyle/>
+          <a:p>
+            <a:pPr>
+              <a:spcAft>
+                <a:spcPts val="300"/>
+              </a:spcAft>
+            </a:pPr>
+            <a:r>
+              <a:rPr sz="1900" b="1" i="0">
+                <a:solidFill>
+                  <a:srgbClr val="1A1A1A"/>
+                </a:solidFill>
+                <a:latin typeface="Arial"/>
+              </a:rPr>
+              <a:t>The proof</a:t>
+            </a:r>
+          </a:p>
+          <a:p>
+            <a:pPr>
+              <a:spcAft>
+                <a:spcPts val="300"/>
+              </a:spcAft>
+            </a:pPr>
+            <a:r>
+              <a:rPr sz="1550" b="0" i="0">
+                <a:solidFill>
+                  <a:srgbClr val="595959"/>
+                </a:solidFill>
+                <a:latin typeface="Arial"/>
+              </a:rPr>
+              <a:t>The governments that have already done it.</a:t>
+            </a:r>
+          </a:p>
+        </p:txBody>
+      </p:sp>
+      <p:sp>
+        <p:nvSpPr>
+          <p:cNvPr id="9" name="Rectangle 8"/>
+          <p:cNvSpPr/>
+          <p:nvPr/>
+        </p:nvSpPr>
+        <p:spPr>
+          <a:xfrm>
+            <a:off x="621792" y="3570732"/>
+            <a:ext cx="10881360" cy="12700"/>
+          </a:xfrm>
+          <a:prstGeom prst="rect">
+            <a:avLst/>
+          </a:prstGeom>
+          <a:solidFill>
+            <a:srgbClr val="DDECF4"/>
+          </a:solidFill>
+          <a:ln>
+            <a:noFill/>
+          </a:ln>
+          <a:effectLst/>
+        </p:spPr>
+        <p:style>
+          <a:lnRef idx="1">
+            <a:schemeClr val="accent1"/>
+          </a:lnRef>
+          <a:fillRef idx="3">
+            <a:schemeClr val="accent1"/>
+          </a:fillRef>
+          <a:effectRef idx="2">
+            <a:schemeClr val="accent1"/>
+          </a:effectRef>
+          <a:fontRef idx="minor">
+            <a:schemeClr val="lt1"/>
+          </a:fontRef>
+        </p:style>
+        <p:txBody>
+          <a:bodyPr rtlCol="0" anchor="ctr"/>
+          <a:lstStyle/>
+          <a:p>
+            <a:pPr algn="ctr"/>
+          </a:p>
+        </p:txBody>
+      </p:sp>
+      <p:sp>
+        <p:nvSpPr>
+          <p:cNvPr id="10" name="Oval 9"/>
+          <p:cNvSpPr/>
+          <p:nvPr/>
+        </p:nvSpPr>
+        <p:spPr>
+          <a:xfrm>
+            <a:off x="621792" y="3657599"/>
+            <a:ext cx="310896" cy="310896"/>
+          </a:xfrm>
+          <a:prstGeom prst="ellipse">
+            <a:avLst/>
+          </a:prstGeom>
+          <a:solidFill>
+            <a:srgbClr val="009CD6"/>
+          </a:solidFill>
+          <a:ln>
+            <a:noFill/>
+          </a:ln>
+          <a:effectLst/>
+        </p:spPr>
+        <p:style>
+          <a:lnRef idx="1">
+            <a:schemeClr val="accent1"/>
+          </a:lnRef>
+          <a:fillRef idx="3">
+            <a:schemeClr val="accent1"/>
+          </a:fillRef>
+          <a:effectRef idx="2">
+            <a:schemeClr val="accent1"/>
+          </a:effectRef>
+          <a:fontRef idx="minor">
+            <a:schemeClr val="lt1"/>
+          </a:fontRef>
+        </p:style>
+        <p:txBody>
+          <a:bodyPr rtlCol="0" anchor="ctr" lIns="0" rIns="0" tIns="0" bIns="0" wrap="square"/>
+          <a:lstStyle/>
+          <a:p>
+            <a:pPr algn="ctr"/>
+            <a:r>
+              <a:rPr sz="1300" b="1" i="0">
+                <a:solidFill>
+                  <a:srgbClr val="FFFFFF"/>
+                </a:solidFill>
+                <a:latin typeface="Arial"/>
+              </a:rPr>
+              <a:t>3</a:t>
+            </a:r>
+          </a:p>
+        </p:txBody>
+      </p:sp>
+      <p:sp>
+        <p:nvSpPr>
+          <p:cNvPr id="11" name="TextBox 10"/>
+          <p:cNvSpPr txBox="1"/>
+          <p:nvPr/>
+        </p:nvSpPr>
+        <p:spPr>
+          <a:xfrm>
+            <a:off x="1115568" y="3611879"/>
+            <a:ext cx="10527487" cy="1028699"/>
+          </a:xfrm>
+          <a:prstGeom prst="rect">
+            <a:avLst/>
+          </a:prstGeom>
+          <a:noFill/>
+        </p:spPr>
+        <p:txBody>
+          <a:bodyPr wrap="square">
+            <a:spAutoFit/>
+          </a:bodyPr>
+          <a:lstStyle/>
+          <a:p>
+            <a:pPr>
+              <a:spcAft>
+                <a:spcPts val="300"/>
+              </a:spcAft>
+            </a:pPr>
+            <a:r>
+              <a:rPr sz="1900" b="1" i="0">
+                <a:solidFill>
+                  <a:srgbClr val="1A1A1A"/>
+                </a:solidFill>
+                <a:latin typeface="Arial"/>
+              </a:rPr>
+              <a:t>The ask</a:t>
+            </a:r>
+          </a:p>
+          <a:p>
+            <a:pPr>
+              <a:spcAft>
+                <a:spcPts val="300"/>
+              </a:spcAft>
+            </a:pPr>
+            <a:r>
+              <a:rPr sz="1550" b="0" i="0">
+                <a:solidFill>
+                  <a:srgbClr val="595959"/>
+                </a:solidFill>
+                <a:latin typeface="Arial"/>
+              </a:rPr>
+              <a:t>A small permanent team, a board with real authority, ~2% sustained, protect the team.</a:t>
+            </a:r>
+          </a:p>
+        </p:txBody>
+      </p:sp>
+      <p:sp>
+        <p:nvSpPr>
+          <p:cNvPr id="12" name="Rectangle 11"/>
+          <p:cNvSpPr/>
+          <p:nvPr/>
+        </p:nvSpPr>
+        <p:spPr>
+          <a:xfrm>
+            <a:off x="621792" y="4645152"/>
+            <a:ext cx="10881360" cy="12700"/>
+          </a:xfrm>
+          <a:prstGeom prst="rect">
+            <a:avLst/>
+          </a:prstGeom>
+          <a:solidFill>
+            <a:srgbClr val="DDECF4"/>
+          </a:solidFill>
+          <a:ln>
+            <a:noFill/>
+          </a:ln>
+          <a:effectLst/>
+        </p:spPr>
+        <p:style>
+          <a:lnRef idx="1">
+            <a:schemeClr val="accent1"/>
+          </a:lnRef>
+          <a:fillRef idx="3">
+            <a:schemeClr val="accent1"/>
+          </a:fillRef>
+          <a:effectRef idx="2">
+            <a:schemeClr val="accent1"/>
+          </a:effectRef>
+          <a:fontRef idx="minor">
+            <a:schemeClr val="lt1"/>
+          </a:fontRef>
+        </p:style>
+        <p:txBody>
+          <a:bodyPr rtlCol="0" anchor="ctr"/>
+          <a:lstStyle/>
+          <a:p>
+            <a:pPr algn="ctr"/>
+          </a:p>
+        </p:txBody>
+      </p:sp>
+      <p:sp>
+        <p:nvSpPr>
+          <p:cNvPr id="13" name="Oval 12"/>
+          <p:cNvSpPr/>
+          <p:nvPr/>
+        </p:nvSpPr>
+        <p:spPr>
+          <a:xfrm>
+            <a:off x="621792" y="4732020"/>
+            <a:ext cx="310896" cy="310896"/>
+          </a:xfrm>
+          <a:prstGeom prst="ellipse">
+            <a:avLst/>
+          </a:prstGeom>
+          <a:solidFill>
+            <a:srgbClr val="009CD6"/>
+          </a:solidFill>
+          <a:ln>
+            <a:noFill/>
+          </a:ln>
+          <a:effectLst/>
+        </p:spPr>
+        <p:style>
+          <a:lnRef idx="1">
+            <a:schemeClr val="accent1"/>
+          </a:lnRef>
+          <a:fillRef idx="3">
+            <a:schemeClr val="accent1"/>
+          </a:fillRef>
+          <a:effectRef idx="2">
+            <a:schemeClr val="accent1"/>
+          </a:effectRef>
+          <a:fontRef idx="minor">
+            <a:schemeClr val="lt1"/>
+          </a:fontRef>
+        </p:style>
+        <p:txBody>
+          <a:bodyPr rtlCol="0" anchor="ctr" lIns="0" rIns="0" tIns="0" bIns="0" wrap="square"/>
+          <a:lstStyle/>
+          <a:p>
+            <a:pPr algn="ctr"/>
+            <a:r>
+              <a:rPr sz="1300" b="1" i="0">
+                <a:solidFill>
+                  <a:srgbClr val="FFFFFF"/>
+                </a:solidFill>
+                <a:latin typeface="Arial"/>
+              </a:rPr>
+              <a:t>4</a:t>
+            </a:r>
+          </a:p>
+        </p:txBody>
+      </p:sp>
+      <p:sp>
+        <p:nvSpPr>
+          <p:cNvPr id="14" name="TextBox 13"/>
+          <p:cNvSpPr txBox="1"/>
+          <p:nvPr/>
+        </p:nvSpPr>
+        <p:spPr>
+          <a:xfrm>
+            <a:off x="1115568" y="4686300"/>
+            <a:ext cx="10527487" cy="1028699"/>
+          </a:xfrm>
+          <a:prstGeom prst="rect">
+            <a:avLst/>
+          </a:prstGeom>
+          <a:noFill/>
+        </p:spPr>
+        <p:txBody>
+          <a:bodyPr wrap="square">
+            <a:spAutoFit/>
+          </a:bodyPr>
+          <a:lstStyle/>
+          <a:p>
+            <a:pPr>
+              <a:spcAft>
+                <a:spcPts val="300"/>
+              </a:spcAft>
+            </a:pPr>
+            <a:r>
+              <a:rPr sz="1900" b="1" i="0">
+                <a:solidFill>
+                  <a:srgbClr val="1A1A1A"/>
+                </a:solidFill>
+                <a:latin typeface="Arial"/>
+              </a:rPr>
+              <a:t>The horizon</a:t>
+            </a:r>
+          </a:p>
+          <a:p>
+            <a:pPr>
+              <a:spcAft>
+                <a:spcPts val="300"/>
+              </a:spcAft>
+            </a:pPr>
+            <a:r>
+              <a:rPr sz="1550" b="0" i="0">
+                <a:solidFill>
+                  <a:srgbClr val="595959"/>
+                </a:solidFill>
+                <a:latin typeface="Arial"/>
+              </a:rPr>
+              <a:t>Six months to a roadmap, then a sustained practice.</a:t>
+            </a:r>
+          </a:p>
+        </p:txBody>
+      </p:sp>
+      <p:sp>
+        <p:nvSpPr>
+          <p:cNvPr id="15" name="TextBox 14"/>
+          <p:cNvSpPr txBox="1"/>
+          <p:nvPr/>
+        </p:nvSpPr>
+        <p:spPr>
+          <a:xfrm>
+            <a:off x="658368" y="5870448"/>
+            <a:ext cx="10881360" cy="548640"/>
+          </a:xfrm>
+          <a:prstGeom prst="rect">
+            <a:avLst/>
+          </a:prstGeom>
+          <a:noFill/>
+        </p:spPr>
+        <p:txBody>
+          <a:bodyPr wrap="square">
+            <a:spAutoFit/>
+          </a:bodyPr>
+          <a:lstStyle/>
+          <a:p>
+            <a:r>
+              <a:rPr sz="1550" b="1" i="0">
                 <a:solidFill>
                   <a:srgbClr val="006E96"/>
                 </a:solidFill>
                 <a:latin typeface="Arial"/>
               </a:rPr>
-              <a:t>A translator is not a shared language. Agree the metamodel; convene the Board.</a:t>
-            </a:r>
-          </a:p>
-        </p:txBody>
-      </p:sp>
-      <p:sp>
-        <p:nvSpPr>
-          <p:cNvPr id="7" name="TextBox 6"/>
+              <a:t>Saving, proof, ask, horizon — a request the minister can defend in cabinet.</a:t>
+            </a:r>
+          </a:p>
+        </p:txBody>
+      </p:sp>
+      <p:sp>
+        <p:nvSpPr>
+          <p:cNvPr id="16" name="TextBox 15"/>
           <p:cNvSpPr txBox="1"/>
           <p:nvPr/>
         </p:nvSpPr>
@@ -14415,7 +14047,7 @@
                 </a:solidFill>
                 <a:latin typeface="Arial"/>
               </a:rPr>
-              <a:t>5.4 · Play 3 — Translate between the minister and the architects</a:t>
+              <a:t>5.4 · Win the commitment — the business case that gets your minister to yes</a:t>
             </a:r>
           </a:p>
         </p:txBody>
@@ -14467,7 +14099,7 @@
                 </a:solidFill>
                 <a:latin typeface="Arial"/>
               </a:rPr>
-              <a:t>This play translates a minister's goal into architecture and back, and decomposes a decision into business, IT and joint parts — so the two sides can finally decide together.</a:t>
+              <a:t>Ministers commit to numbers and proof, not architecture — pair the whole-of-government saving with the evidence and an honest cost, and you turn a technical request into a cabinet-ready case.</a:t>
             </a:r>
           </a:p>
         </p:txBody>
@@ -14535,7 +14167,7 @@
                 </a:solidFill>
                 <a:latin typeface="Arial"/>
               </a:rPr>
-              <a:t>5.4 · Play 3 — Translate between the minister and the architects</a:t>
+              <a:t>5.4 · Win the commitment — the business case that gets your minister to yes</a:t>
             </a:r>
           </a:p>
         </p:txBody>
@@ -14705,7 +14337,7 @@
                 </a:solidFill>
                 <a:latin typeface="Arial"/>
               </a:rPr>
-              <a:t>•  PAERA v1.0 — §2.3 (Role of Enterprise Architecture)</a:t>
+              <a:t>•  PAERA v1.0 — §5.6 (Sourcing Strategy)</a:t>
             </a:r>
           </a:p>
           <a:p>
@@ -14721,7 +14353,7 @@
                 </a:solidFill>
                 <a:latin typeface="Arial"/>
               </a:rPr>
-              <a:t>•  PAERA v1.0 — §4.5 (Digital Co-creation)</a:t>
+              <a:t>•  PAERA v1.0 — §5.4 (Organisational Assessment &amp; Roadmap)</a:t>
             </a:r>
           </a:p>
         </p:txBody>
@@ -14789,7 +14421,7 @@
                 </a:solidFill>
                 <a:latin typeface="Arial"/>
               </a:rPr>
-              <a:t>5.4 · Play 3 — Translate between the minister and the architects</a:t>
+              <a:t>5.4 · Win the commitment — the business case that gets your minister to yes</a:t>
             </a:r>
           </a:p>
         </p:txBody>
